--- a/Pregrado/Trabajo de grado 2/Clases/Sesion 09 - Integración del avance · correcciones/Presentacion.pptx
+++ b/Pregrado/Trabajo de grado 2/Clases/Sesion 09 - Integración del avance · correcciones/Presentacion.pptx
@@ -3361,41 +3361,6 @@
                 <a:latin typeface="Calibri"/>
               </a:rPr>
               <a:t> TRABAJO DE GRADO 2</a:t>
-            </a:r>
-          </a:p>
-        </p:txBody>
-      </p:sp>
-      <p:sp>
-        <p:nvSpPr>
-          <p:cNvPr id="7" name="TextBox 6"/>
-          <p:cNvSpPr txBox="1"/>
-          <p:nvPr/>
-        </p:nvSpPr>
-        <p:spPr>
-          <a:xfrm>
-            <a:off x="2194560" y="6446520"/>
-            <a:ext cx="5943600" cy="274320"/>
-          </a:xfrm>
-          <a:prstGeom prst="rect">
-            <a:avLst/>
-          </a:prstGeom>
-          <a:noFill/>
-        </p:spPr>
-        <p:txBody>
-          <a:bodyPr wrap="square" anchor="t" lIns="0" rIns="0" tIns="0" bIns="0">
-            <a:spAutoFit/>
-          </a:bodyPr>
-          <a:lstStyle/>
-          <a:p>
-            <a:pPr algn="l"/>
-            <a:r>
-              <a:rPr sz="1000" b="1" i="0">
-                <a:solidFill>
-                  <a:srgbClr val="8F989D"/>
-                </a:solidFill>
-                <a:latin typeface="Calibri"/>
-              </a:rPr>
-              <a:t>Inicio 5:10 pm</a:t>
             </a:r>
           </a:p>
         </p:txBody>
@@ -3929,41 +3894,6 @@
         </p:nvSpPr>
         <p:spPr>
           <a:xfrm>
-            <a:off x="2194560" y="6446520"/>
-            <a:ext cx="5943600" cy="274320"/>
-          </a:xfrm>
-          <a:prstGeom prst="rect">
-            <a:avLst/>
-          </a:prstGeom>
-          <a:noFill/>
-        </p:spPr>
-        <p:txBody>
-          <a:bodyPr wrap="square" anchor="t" lIns="0" rIns="0" tIns="0" bIns="0">
-            <a:spAutoFit/>
-          </a:bodyPr>
-          <a:lstStyle/>
-          <a:p>
-            <a:pPr algn="l"/>
-            <a:r>
-              <a:rPr sz="1000" b="1" i="0">
-                <a:solidFill>
-                  <a:srgbClr val="8F989D"/>
-                </a:solidFill>
-                <a:latin typeface="Calibri"/>
-              </a:rPr>
-              <a:t>Inicio 5:10 pm</a:t>
-            </a:r>
-          </a:p>
-        </p:txBody>
-      </p:sp>
-      <p:sp>
-        <p:nvSpPr>
-          <p:cNvPr id="7" name="TextBox 6"/>
-          <p:cNvSpPr txBox="1"/>
-          <p:nvPr/>
-        </p:nvSpPr>
-        <p:spPr>
-          <a:xfrm>
             <a:off x="11094415" y="6446520"/>
             <a:ext cx="548640" cy="274320"/>
           </a:xfrm>
@@ -4386,41 +4316,6 @@
         </p:nvSpPr>
         <p:spPr>
           <a:xfrm>
-            <a:off x="2194560" y="6446520"/>
-            <a:ext cx="5943600" cy="274320"/>
-          </a:xfrm>
-          <a:prstGeom prst="rect">
-            <a:avLst/>
-          </a:prstGeom>
-          <a:noFill/>
-        </p:spPr>
-        <p:txBody>
-          <a:bodyPr wrap="square" anchor="t" lIns="0" rIns="0" tIns="0" bIns="0">
-            <a:spAutoFit/>
-          </a:bodyPr>
-          <a:lstStyle/>
-          <a:p>
-            <a:pPr algn="l"/>
-            <a:r>
-              <a:rPr sz="1000" b="1" i="0">
-                <a:solidFill>
-                  <a:srgbClr val="8F989D"/>
-                </a:solidFill>
-                <a:latin typeface="Calibri"/>
-              </a:rPr>
-              <a:t>Inicio 5:10 pm</a:t>
-            </a:r>
-          </a:p>
-        </p:txBody>
-      </p:sp>
-      <p:sp>
-        <p:nvSpPr>
-          <p:cNvPr id="11" name="TextBox 10"/>
-          <p:cNvSpPr txBox="1"/>
-          <p:nvPr/>
-        </p:nvSpPr>
-        <p:spPr>
-          <a:xfrm>
             <a:off x="11094415" y="6446520"/>
             <a:ext cx="548640" cy="274320"/>
           </a:xfrm>
@@ -4655,41 +4550,6 @@
         </p:nvSpPr>
         <p:spPr>
           <a:xfrm>
-            <a:off x="2194560" y="6446520"/>
-            <a:ext cx="5943600" cy="274320"/>
-          </a:xfrm>
-          <a:prstGeom prst="rect">
-            <a:avLst/>
-          </a:prstGeom>
-          <a:noFill/>
-        </p:spPr>
-        <p:txBody>
-          <a:bodyPr wrap="square" anchor="t" lIns="0" rIns="0" tIns="0" bIns="0">
-            <a:spAutoFit/>
-          </a:bodyPr>
-          <a:lstStyle/>
-          <a:p>
-            <a:pPr algn="l"/>
-            <a:r>
-              <a:rPr sz="1000" b="1" i="0">
-                <a:solidFill>
-                  <a:srgbClr val="8F989D"/>
-                </a:solidFill>
-                <a:latin typeface="Calibri"/>
-              </a:rPr>
-              <a:t>Inicio 5:10 pm</a:t>
-            </a:r>
-          </a:p>
-        </p:txBody>
-      </p:sp>
-      <p:sp>
-        <p:nvSpPr>
-          <p:cNvPr id="7" name="TextBox 6"/>
-          <p:cNvSpPr txBox="1"/>
-          <p:nvPr/>
-        </p:nvSpPr>
-        <p:spPr>
-          <a:xfrm>
             <a:off x="11094415" y="6446520"/>
             <a:ext cx="548640" cy="274320"/>
           </a:xfrm>
@@ -5197,41 +5057,6 @@
         </p:nvSpPr>
         <p:spPr>
           <a:xfrm>
-            <a:off x="2194560" y="6446520"/>
-            <a:ext cx="5943600" cy="274320"/>
-          </a:xfrm>
-          <a:prstGeom prst="rect">
-            <a:avLst/>
-          </a:prstGeom>
-          <a:noFill/>
-        </p:spPr>
-        <p:txBody>
-          <a:bodyPr wrap="square" anchor="t" lIns="0" rIns="0" tIns="0" bIns="0">
-            <a:spAutoFit/>
-          </a:bodyPr>
-          <a:lstStyle/>
-          <a:p>
-            <a:pPr algn="l"/>
-            <a:r>
-              <a:rPr sz="1000" b="1" i="0">
-                <a:solidFill>
-                  <a:srgbClr val="8F989D"/>
-                </a:solidFill>
-                <a:latin typeface="Calibri"/>
-              </a:rPr>
-              <a:t>Inicio 5:10 pm</a:t>
-            </a:r>
-          </a:p>
-        </p:txBody>
-      </p:sp>
-      <p:sp>
-        <p:nvSpPr>
-          <p:cNvPr id="6" name="TextBox 5"/>
-          <p:cNvSpPr txBox="1"/>
-          <p:nvPr/>
-        </p:nvSpPr>
-        <p:spPr>
-          <a:xfrm>
             <a:off x="11094415" y="6446520"/>
             <a:ext cx="548640" cy="274320"/>
           </a:xfrm>
@@ -5595,41 +5420,6 @@
         </p:nvSpPr>
         <p:spPr>
           <a:xfrm>
-            <a:off x="2194560" y="6446520"/>
-            <a:ext cx="5943600" cy="274320"/>
-          </a:xfrm>
-          <a:prstGeom prst="rect">
-            <a:avLst/>
-          </a:prstGeom>
-          <a:noFill/>
-        </p:spPr>
-        <p:txBody>
-          <a:bodyPr wrap="square" anchor="t" lIns="0" rIns="0" tIns="0" bIns="0">
-            <a:spAutoFit/>
-          </a:bodyPr>
-          <a:lstStyle/>
-          <a:p>
-            <a:pPr algn="l"/>
-            <a:r>
-              <a:rPr sz="1000" b="1" i="0">
-                <a:solidFill>
-                  <a:srgbClr val="8F989D"/>
-                </a:solidFill>
-                <a:latin typeface="Calibri"/>
-              </a:rPr>
-              <a:t>Inicio 5:10 pm</a:t>
-            </a:r>
-          </a:p>
-        </p:txBody>
-      </p:sp>
-      <p:sp>
-        <p:nvSpPr>
-          <p:cNvPr id="6" name="TextBox 5"/>
-          <p:cNvSpPr txBox="1"/>
-          <p:nvPr/>
-        </p:nvSpPr>
-        <p:spPr>
-          <a:xfrm>
             <a:off x="11094415" y="6446520"/>
             <a:ext cx="548640" cy="274320"/>
           </a:xfrm>
@@ -6103,41 +5893,6 @@
         </p:nvSpPr>
         <p:spPr>
           <a:xfrm>
-            <a:off x="2194560" y="6446520"/>
-            <a:ext cx="5943600" cy="274320"/>
-          </a:xfrm>
-          <a:prstGeom prst="rect">
-            <a:avLst/>
-          </a:prstGeom>
-          <a:noFill/>
-        </p:spPr>
-        <p:txBody>
-          <a:bodyPr wrap="square" anchor="t" lIns="0" rIns="0" tIns="0" bIns="0">
-            <a:spAutoFit/>
-          </a:bodyPr>
-          <a:lstStyle/>
-          <a:p>
-            <a:pPr algn="l"/>
-            <a:r>
-              <a:rPr sz="1000" b="1" i="0">
-                <a:solidFill>
-                  <a:srgbClr val="8F989D"/>
-                </a:solidFill>
-                <a:latin typeface="Calibri"/>
-              </a:rPr>
-              <a:t>Inicio 5:10 pm</a:t>
-            </a:r>
-          </a:p>
-        </p:txBody>
-      </p:sp>
-      <p:sp>
-        <p:nvSpPr>
-          <p:cNvPr id="6" name="TextBox 5"/>
-          <p:cNvSpPr txBox="1"/>
-          <p:nvPr/>
-        </p:nvSpPr>
-        <p:spPr>
-          <a:xfrm>
             <a:off x="11094415" y="6446520"/>
             <a:ext cx="548640" cy="274320"/>
           </a:xfrm>
@@ -6429,41 +6184,6 @@
         </p:nvSpPr>
         <p:spPr>
           <a:xfrm>
-            <a:off x="2194560" y="6446520"/>
-            <a:ext cx="5943600" cy="274320"/>
-          </a:xfrm>
-          <a:prstGeom prst="rect">
-            <a:avLst/>
-          </a:prstGeom>
-          <a:noFill/>
-        </p:spPr>
-        <p:txBody>
-          <a:bodyPr wrap="square" anchor="t" lIns="0" rIns="0" tIns="0" bIns="0">
-            <a:spAutoFit/>
-          </a:bodyPr>
-          <a:lstStyle/>
-          <a:p>
-            <a:pPr algn="l"/>
-            <a:r>
-              <a:rPr sz="1000" b="1" i="0">
-                <a:solidFill>
-                  <a:srgbClr val="8F989D"/>
-                </a:solidFill>
-                <a:latin typeface="Calibri"/>
-              </a:rPr>
-              <a:t>Inicio 5:10 pm</a:t>
-            </a:r>
-          </a:p>
-        </p:txBody>
-      </p:sp>
-      <p:sp>
-        <p:nvSpPr>
-          <p:cNvPr id="6" name="TextBox 5"/>
-          <p:cNvSpPr txBox="1"/>
-          <p:nvPr/>
-        </p:nvSpPr>
-        <p:spPr>
-          <a:xfrm>
             <a:off x="11094415" y="6446520"/>
             <a:ext cx="548640" cy="274320"/>
           </a:xfrm>
@@ -6795,41 +6515,6 @@
         </p:nvSpPr>
         <p:spPr>
           <a:xfrm>
-            <a:off x="2194560" y="6446520"/>
-            <a:ext cx="5943600" cy="274320"/>
-          </a:xfrm>
-          <a:prstGeom prst="rect">
-            <a:avLst/>
-          </a:prstGeom>
-          <a:noFill/>
-        </p:spPr>
-        <p:txBody>
-          <a:bodyPr wrap="square" anchor="t" lIns="0" rIns="0" tIns="0" bIns="0">
-            <a:spAutoFit/>
-          </a:bodyPr>
-          <a:lstStyle/>
-          <a:p>
-            <a:pPr algn="l"/>
-            <a:r>
-              <a:rPr sz="1000" b="1" i="0">
-                <a:solidFill>
-                  <a:srgbClr val="8F989D"/>
-                </a:solidFill>
-                <a:latin typeface="Calibri"/>
-              </a:rPr>
-              <a:t>Inicio 5:10 pm</a:t>
-            </a:r>
-          </a:p>
-        </p:txBody>
-      </p:sp>
-      <p:sp>
-        <p:nvSpPr>
-          <p:cNvPr id="6" name="TextBox 5"/>
-          <p:cNvSpPr txBox="1"/>
-          <p:nvPr/>
-        </p:nvSpPr>
-        <p:spPr>
-          <a:xfrm>
             <a:off x="11094415" y="6446520"/>
             <a:ext cx="548640" cy="274320"/>
           </a:xfrm>
@@ -7076,41 +6761,6 @@
           </a:p>
         </p:txBody>
       </p:sp>
-      <p:sp>
-        <p:nvSpPr>
-          <p:cNvPr id="7" name="TextBox 6"/>
-          <p:cNvSpPr txBox="1"/>
-          <p:nvPr/>
-        </p:nvSpPr>
-        <p:spPr>
-          <a:xfrm>
-            <a:off x="2194560" y="6446520"/>
-            <a:ext cx="5943600" cy="274320"/>
-          </a:xfrm>
-          <a:prstGeom prst="rect">
-            <a:avLst/>
-          </a:prstGeom>
-          <a:noFill/>
-        </p:spPr>
-        <p:txBody>
-          <a:bodyPr wrap="square" anchor="t" lIns="0" rIns="0" tIns="0" bIns="0">
-            <a:spAutoFit/>
-          </a:bodyPr>
-          <a:lstStyle/>
-          <a:p>
-            <a:pPr algn="l"/>
-            <a:r>
-              <a:rPr sz="1000" b="1" i="0">
-                <a:solidFill>
-                  <a:srgbClr val="8F989D"/>
-                </a:solidFill>
-                <a:latin typeface="Calibri"/>
-              </a:rPr>
-              <a:t>Inicio 5:10 pm</a:t>
-            </a:r>
-          </a:p>
-        </p:txBody>
-      </p:sp>
     </p:spTree>
   </p:cSld>
   <p:clrMapOvr>
@@ -7449,41 +7099,6 @@
         </p:nvSpPr>
         <p:spPr>
           <a:xfrm>
-            <a:off x="2194560" y="6446520"/>
-            <a:ext cx="5943600" cy="274320"/>
-          </a:xfrm>
-          <a:prstGeom prst="rect">
-            <a:avLst/>
-          </a:prstGeom>
-          <a:noFill/>
-        </p:spPr>
-        <p:txBody>
-          <a:bodyPr wrap="square" anchor="t" lIns="0" rIns="0" tIns="0" bIns="0">
-            <a:spAutoFit/>
-          </a:bodyPr>
-          <a:lstStyle/>
-          <a:p>
-            <a:pPr algn="l"/>
-            <a:r>
-              <a:rPr sz="1000" b="1" i="0">
-                <a:solidFill>
-                  <a:srgbClr val="8F989D"/>
-                </a:solidFill>
-                <a:latin typeface="Calibri"/>
-              </a:rPr>
-              <a:t>Inicio 5:10 pm</a:t>
-            </a:r>
-          </a:p>
-        </p:txBody>
-      </p:sp>
-      <p:sp>
-        <p:nvSpPr>
-          <p:cNvPr id="6" name="TextBox 5"/>
-          <p:cNvSpPr txBox="1"/>
-          <p:nvPr/>
-        </p:nvSpPr>
-        <p:spPr>
-          <a:xfrm>
             <a:off x="11094415" y="6446520"/>
             <a:ext cx="548640" cy="274320"/>
           </a:xfrm>
@@ -7513,7 +7128,7 @@
       </p:sp>
       <p:sp>
         <p:nvSpPr>
-          <p:cNvPr id="7" name="TextBox 6"/>
+          <p:cNvPr id="6" name="TextBox 5"/>
           <p:cNvSpPr txBox="1"/>
           <p:nvPr/>
         </p:nvSpPr>
@@ -7964,41 +7579,6 @@
       <p:sp>
         <p:nvSpPr>
           <p:cNvPr id="5" name="TextBox 4"/>
-          <p:cNvSpPr txBox="1"/>
-          <p:nvPr/>
-        </p:nvSpPr>
-        <p:spPr>
-          <a:xfrm>
-            <a:off x="2194560" y="6446520"/>
-            <a:ext cx="5943600" cy="274320"/>
-          </a:xfrm>
-          <a:prstGeom prst="rect">
-            <a:avLst/>
-          </a:prstGeom>
-          <a:noFill/>
-        </p:spPr>
-        <p:txBody>
-          <a:bodyPr wrap="square" anchor="t" lIns="0" rIns="0" tIns="0" bIns="0">
-            <a:spAutoFit/>
-          </a:bodyPr>
-          <a:lstStyle/>
-          <a:p>
-            <a:pPr algn="l"/>
-            <a:r>
-              <a:rPr sz="1000" b="1" i="0">
-                <a:solidFill>
-                  <a:srgbClr val="8F989D"/>
-                </a:solidFill>
-                <a:latin typeface="Calibri"/>
-              </a:rPr>
-              <a:t>Inicio 5:10 pm</a:t>
-            </a:r>
-          </a:p>
-        </p:txBody>
-      </p:sp>
-      <p:sp>
-        <p:nvSpPr>
-          <p:cNvPr id="6" name="TextBox 5"/>
           <p:cNvSpPr txBox="1"/>
           <p:nvPr/>
         </p:nvSpPr>
@@ -8702,41 +8282,6 @@
         </p:nvSpPr>
         <p:spPr>
           <a:xfrm>
-            <a:off x="2194560" y="6446520"/>
-            <a:ext cx="5943600" cy="274320"/>
-          </a:xfrm>
-          <a:prstGeom prst="rect">
-            <a:avLst/>
-          </a:prstGeom>
-          <a:noFill/>
-        </p:spPr>
-        <p:txBody>
-          <a:bodyPr wrap="square" anchor="t" lIns="0" rIns="0" tIns="0" bIns="0">
-            <a:spAutoFit/>
-          </a:bodyPr>
-          <a:lstStyle/>
-          <a:p>
-            <a:pPr algn="l"/>
-            <a:r>
-              <a:rPr sz="1000" b="1" i="0">
-                <a:solidFill>
-                  <a:srgbClr val="8F989D"/>
-                </a:solidFill>
-                <a:latin typeface="Calibri"/>
-              </a:rPr>
-              <a:t>Inicio 5:10 pm</a:t>
-            </a:r>
-          </a:p>
-        </p:txBody>
-      </p:sp>
-      <p:sp>
-        <p:nvSpPr>
-          <p:cNvPr id="7" name="TextBox 6"/>
-          <p:cNvSpPr txBox="1"/>
-          <p:nvPr/>
-        </p:nvSpPr>
-        <p:spPr>
-          <a:xfrm>
             <a:off x="11094415" y="6446520"/>
             <a:ext cx="548640" cy="274320"/>
           </a:xfrm>
@@ -9118,41 +8663,6 @@
         </p:nvSpPr>
         <p:spPr>
           <a:xfrm>
-            <a:off x="2194560" y="6446520"/>
-            <a:ext cx="5943600" cy="274320"/>
-          </a:xfrm>
-          <a:prstGeom prst="rect">
-            <a:avLst/>
-          </a:prstGeom>
-          <a:noFill/>
-        </p:spPr>
-        <p:txBody>
-          <a:bodyPr wrap="square" anchor="t" lIns="0" rIns="0" tIns="0" bIns="0">
-            <a:spAutoFit/>
-          </a:bodyPr>
-          <a:lstStyle/>
-          <a:p>
-            <a:pPr algn="l"/>
-            <a:r>
-              <a:rPr sz="1000" b="1" i="0">
-                <a:solidFill>
-                  <a:srgbClr val="8F989D"/>
-                </a:solidFill>
-                <a:latin typeface="Calibri"/>
-              </a:rPr>
-              <a:t>Inicio 5:10 pm</a:t>
-            </a:r>
-          </a:p>
-        </p:txBody>
-      </p:sp>
-      <p:sp>
-        <p:nvSpPr>
-          <p:cNvPr id="6" name="TextBox 5"/>
-          <p:cNvSpPr txBox="1"/>
-          <p:nvPr/>
-        </p:nvSpPr>
-        <p:spPr>
-          <a:xfrm>
             <a:off x="11094415" y="6446520"/>
             <a:ext cx="548640" cy="274320"/>
           </a:xfrm>
@@ -9511,41 +9021,6 @@
       <p:sp>
         <p:nvSpPr>
           <p:cNvPr id="5" name="TextBox 4"/>
-          <p:cNvSpPr txBox="1"/>
-          <p:nvPr/>
-        </p:nvSpPr>
-        <p:spPr>
-          <a:xfrm>
-            <a:off x="2194560" y="6446520"/>
-            <a:ext cx="5943600" cy="274320"/>
-          </a:xfrm>
-          <a:prstGeom prst="rect">
-            <a:avLst/>
-          </a:prstGeom>
-          <a:noFill/>
-        </p:spPr>
-        <p:txBody>
-          <a:bodyPr wrap="square" anchor="t" lIns="0" rIns="0" tIns="0" bIns="0">
-            <a:spAutoFit/>
-          </a:bodyPr>
-          <a:lstStyle/>
-          <a:p>
-            <a:pPr algn="l"/>
-            <a:r>
-              <a:rPr sz="1000" b="1" i="0">
-                <a:solidFill>
-                  <a:srgbClr val="8F989D"/>
-                </a:solidFill>
-                <a:latin typeface="Calibri"/>
-              </a:rPr>
-              <a:t>Inicio 5:10 pm</a:t>
-            </a:r>
-          </a:p>
-        </p:txBody>
-      </p:sp>
-      <p:sp>
-        <p:nvSpPr>
-          <p:cNvPr id="6" name="TextBox 5"/>
           <p:cNvSpPr txBox="1"/>
           <p:nvPr/>
         </p:nvSpPr>
@@ -10391,41 +9866,6 @@
         </p:nvSpPr>
         <p:spPr>
           <a:xfrm>
-            <a:off x="2194560" y="6446520"/>
-            <a:ext cx="5943600" cy="274320"/>
-          </a:xfrm>
-          <a:prstGeom prst="rect">
-            <a:avLst/>
-          </a:prstGeom>
-          <a:noFill/>
-        </p:spPr>
-        <p:txBody>
-          <a:bodyPr wrap="square" anchor="t" lIns="0" rIns="0" tIns="0" bIns="0">
-            <a:spAutoFit/>
-          </a:bodyPr>
-          <a:lstStyle/>
-          <a:p>
-            <a:pPr algn="l"/>
-            <a:r>
-              <a:rPr sz="1000" b="1" i="0">
-                <a:solidFill>
-                  <a:srgbClr val="8F989D"/>
-                </a:solidFill>
-                <a:latin typeface="Calibri"/>
-              </a:rPr>
-              <a:t>Inicio 5:10 pm</a:t>
-            </a:r>
-          </a:p>
-        </p:txBody>
-      </p:sp>
-      <p:sp>
-        <p:nvSpPr>
-          <p:cNvPr id="7" name="TextBox 6"/>
-          <p:cNvSpPr txBox="1"/>
-          <p:nvPr/>
-        </p:nvSpPr>
-        <p:spPr>
-          <a:xfrm>
             <a:off x="11094415" y="6446520"/>
             <a:ext cx="548640" cy="274320"/>
           </a:xfrm>
@@ -10786,41 +10226,6 @@
       <p:sp>
         <p:nvSpPr>
           <p:cNvPr id="5" name="TextBox 4"/>
-          <p:cNvSpPr txBox="1"/>
-          <p:nvPr/>
-        </p:nvSpPr>
-        <p:spPr>
-          <a:xfrm>
-            <a:off x="2194560" y="6446520"/>
-            <a:ext cx="5943600" cy="274320"/>
-          </a:xfrm>
-          <a:prstGeom prst="rect">
-            <a:avLst/>
-          </a:prstGeom>
-          <a:noFill/>
-        </p:spPr>
-        <p:txBody>
-          <a:bodyPr wrap="square" anchor="t" lIns="0" rIns="0" tIns="0" bIns="0">
-            <a:spAutoFit/>
-          </a:bodyPr>
-          <a:lstStyle/>
-          <a:p>
-            <a:pPr algn="l"/>
-            <a:r>
-              <a:rPr sz="1000" b="1" i="0">
-                <a:solidFill>
-                  <a:srgbClr val="8F989D"/>
-                </a:solidFill>
-                <a:latin typeface="Calibri"/>
-              </a:rPr>
-              <a:t>Inicio 5:10 pm</a:t>
-            </a:r>
-          </a:p>
-        </p:txBody>
-      </p:sp>
-      <p:sp>
-        <p:nvSpPr>
-          <p:cNvPr id="6" name="TextBox 5"/>
           <p:cNvSpPr txBox="1"/>
           <p:nvPr/>
         </p:nvSpPr>
@@ -11780,41 +11185,6 @@
         </p:nvSpPr>
         <p:spPr>
           <a:xfrm>
-            <a:off x="2194560" y="6446520"/>
-            <a:ext cx="5943600" cy="274320"/>
-          </a:xfrm>
-          <a:prstGeom prst="rect">
-            <a:avLst/>
-          </a:prstGeom>
-          <a:noFill/>
-        </p:spPr>
-        <p:txBody>
-          <a:bodyPr wrap="square" anchor="t" lIns="0" rIns="0" tIns="0" bIns="0">
-            <a:spAutoFit/>
-          </a:bodyPr>
-          <a:lstStyle/>
-          <a:p>
-            <a:pPr algn="l"/>
-            <a:r>
-              <a:rPr sz="1000" b="1" i="0">
-                <a:solidFill>
-                  <a:srgbClr val="8F989D"/>
-                </a:solidFill>
-                <a:latin typeface="Calibri"/>
-              </a:rPr>
-              <a:t>Inicio 5:10 pm</a:t>
-            </a:r>
-          </a:p>
-        </p:txBody>
-      </p:sp>
-      <p:sp>
-        <p:nvSpPr>
-          <p:cNvPr id="7" name="TextBox 6"/>
-          <p:cNvSpPr txBox="1"/>
-          <p:nvPr/>
-        </p:nvSpPr>
-        <p:spPr>
-          <a:xfrm>
             <a:off x="11094415" y="6446520"/>
             <a:ext cx="548640" cy="274320"/>
           </a:xfrm>

--- a/Pregrado/Trabajo de grado 2/Clases/Sesion 09 - Integración del avance · correcciones/Presentacion.pptx
+++ b/Pregrado/Trabajo de grado 2/Clases/Sesion 09 - Integración del avance · correcciones/Presentacion.pptx
@@ -23,6 +23,8 @@
     <p:sldId id="271" r:id="rId22"/>
     <p:sldId id="272" r:id="rId23"/>
     <p:sldId id="273" r:id="rId24"/>
+    <p:sldId id="274" r:id="rId25"/>
+    <p:sldId id="275" r:id="rId26"/>
   </p:sldIdLst>
   <p:sldSz cx="12191695" cy="6858000" type="screen4x3"/>
   <p:notesSz cx="6858000" cy="9144000"/>
@@ -5044,7 +5046,7 @@
                 </a:solidFill>
                 <a:latin typeface="Calibri"/>
               </a:rPr>
-              <a:t> — [URL CDigital — campus del curso pendiente].</a:t>
+              <a:t> — https://cdigital.cun.edu.co/course/view.php?id=129268.</a:t>
             </a:r>
           </a:p>
         </p:txBody>
@@ -5547,7 +5549,7 @@
                 </a:solidFill>
                 <a:latin typeface="Calibri"/>
               </a:rPr>
-              <a:t>TALLER — Semáforo y matriz de gaps de su propio avance</a:t>
+              <a:t>TALLER · Semáforo y matriz de gaps de su propio avance</a:t>
             </a:r>
           </a:p>
         </p:txBody>
@@ -5560,8 +5562,8 @@
         </p:nvSpPr>
         <p:spPr>
           <a:xfrm>
-            <a:off x="640080" y="1691639"/>
-            <a:ext cx="10911535" cy="4617720"/>
+            <a:off x="640080" y="1280160"/>
+            <a:ext cx="10911535" cy="411480"/>
           </a:xfrm>
           <a:prstGeom prst="rect">
             <a:avLst/>
@@ -5574,6 +5576,41 @@
           </a:bodyPr>
           <a:lstStyle/>
           <a:p>
+            <a:pPr algn="ctr"/>
+            <a:r>
+              <a:rPr sz="1500" b="0" i="0">
+                <a:solidFill>
+                  <a:srgbClr val="2B2B2B"/>
+                </a:solidFill>
+                <a:latin typeface="Calibri"/>
+              </a:rPr>
+              <a:t>Individual, con acompañamiento del Docente</a:t>
+            </a:r>
+          </a:p>
+        </p:txBody>
+      </p:sp>
+      <p:sp>
+        <p:nvSpPr>
+          <p:cNvPr id="5" name="TextBox 4"/>
+          <p:cNvSpPr txBox="1"/>
+          <p:nvPr/>
+        </p:nvSpPr>
+        <p:spPr>
+          <a:xfrm>
+            <a:off x="640080" y="2011679"/>
+            <a:ext cx="10911535" cy="4297680"/>
+          </a:xfrm>
+          <a:prstGeom prst="rect">
+            <a:avLst/>
+          </a:prstGeom>
+          <a:noFill/>
+        </p:spPr>
+        <p:txBody>
+          <a:bodyPr wrap="square" anchor="t" lIns="0" rIns="0" tIns="0" bIns="0">
+            <a:spAutoFit/>
+          </a:bodyPr>
+          <a:lstStyle/>
+          <a:p>
             <a:pPr>
               <a:spcAft>
                 <a:spcPts val="1000"/>
@@ -5595,7 +5632,7 @@
                 </a:solidFill>
                 <a:latin typeface="Calibri"/>
               </a:rPr>
-              <a:t>Tiempo:</a:t>
+              <a:t>Al final tiene:</a:t>
             </a:r>
             <a:r>
               <a:rPr sz="1600" b="0" i="0">
@@ -5604,7 +5641,7 @@
                 </a:solidFill>
                 <a:latin typeface="Calibri"/>
               </a:rPr>
-              <a:t> 20 minutos de trabajo individual, con acompañamiento del Docente.</a:t>
+              <a:t> el semáforo por sección, la matriz de gaps y el gap de prioridad alta ya empezado.</a:t>
             </a:r>
           </a:p>
           <a:p>
@@ -5629,7 +5666,7 @@
                 </a:solidFill>
                 <a:latin typeface="Calibri"/>
               </a:rPr>
-              <a:t>Archivo:</a:t>
+              <a:t>Paso 1</a:t>
             </a:r>
             <a:r>
               <a:rPr sz="1600" b="0" i="0">
@@ -5638,7 +5675,43 @@
                 </a:solidFill>
                 <a:latin typeface="Calibri"/>
               </a:rPr>
-              <a:t> un documento en Google Docs llamado S09_Integracion_Apellido.</a:t>
+              <a:t> · Lea su documento de corrido usando </a:t>
+            </a:r>
+            <a:r>
+              <a:rPr sz="1600" b="1" i="0">
+                <a:solidFill>
+                  <a:srgbClr val="2B2B2B"/>
+                </a:solidFill>
+                <a:latin typeface="Calibri"/>
+              </a:rPr>
+              <a:t>al menos dos</a:t>
+            </a:r>
+            <a:r>
+              <a:rPr sz="1600" b="0" i="0">
+                <a:solidFill>
+                  <a:srgbClr val="2B2B2B"/>
+                </a:solidFill>
+                <a:latin typeface="Calibri"/>
+              </a:rPr>
+              <a:t> de las cuatro técnicas y llene el </a:t>
+            </a:r>
+            <a:r>
+              <a:rPr sz="1600" b="1" i="0">
+                <a:solidFill>
+                  <a:srgbClr val="2B2B2B"/>
+                </a:solidFill>
+                <a:latin typeface="Calibri"/>
+              </a:rPr>
+              <a:t>semáforo</a:t>
+            </a:r>
+            <a:r>
+              <a:rPr sz="1600" b="0" i="0">
+                <a:solidFill>
+                  <a:srgbClr val="2B2B2B"/>
+                </a:solidFill>
+                <a:latin typeface="Calibri"/>
+              </a:rPr>
+              <a:t> por sección.</a:t>
             </a:r>
           </a:p>
           <a:p>
@@ -5663,7 +5736,7 @@
                 </a:solidFill>
                 <a:latin typeface="Calibri"/>
               </a:rPr>
-              <a:t>Consigna 1.</a:t>
+              <a:t>Paso 2</a:t>
             </a:r>
             <a:r>
               <a:rPr sz="1600" b="0" i="0">
@@ -5672,7 +5745,7 @@
                 </a:solidFill>
                 <a:latin typeface="Calibri"/>
               </a:rPr>
-              <a:t> Lea su documento de corrido usando al menos dos de las cuatro técnicas y llene el </a:t>
+              <a:t> · Construya la </a:t>
             </a:r>
             <a:r>
               <a:rPr sz="1600" b="1" i="0">
@@ -5681,7 +5754,7 @@
                 </a:solidFill>
                 <a:latin typeface="Calibri"/>
               </a:rPr>
-              <a:t>semáforo</a:t>
+              <a:t>matriz de gaps</a:t>
             </a:r>
             <a:r>
               <a:rPr sz="1600" b="0" i="0">
@@ -5690,7 +5763,7 @@
                 </a:solidFill>
                 <a:latin typeface="Calibri"/>
               </a:rPr>
-              <a:t> por sección.</a:t>
+              <a:t>: cada amarillo y cada rojo con prioridad, acción concreta y evidencia de cierre.</a:t>
             </a:r>
           </a:p>
           <a:p>
@@ -5715,7 +5788,7 @@
                 </a:solidFill>
                 <a:latin typeface="Calibri"/>
               </a:rPr>
-              <a:t>Consigna 2.</a:t>
+              <a:t>Paso 3</a:t>
             </a:r>
             <a:r>
               <a:rPr sz="1600" b="0" i="0">
@@ -5724,7 +5797,7 @@
                 </a:solidFill>
                 <a:latin typeface="Calibri"/>
               </a:rPr>
-              <a:t> Construya la </a:t>
+              <a:t> · Empiece aquí mismo a cerrar el gap de </a:t>
             </a:r>
             <a:r>
               <a:rPr sz="1600" b="1" i="0">
@@ -5733,7 +5806,7 @@
                 </a:solidFill>
                 <a:latin typeface="Calibri"/>
               </a:rPr>
-              <a:t>matriz de gaps</a:t>
+              <a:t>prioridad más alta</a:t>
             </a:r>
             <a:r>
               <a:rPr sz="1600" b="0" i="0">
@@ -5742,7 +5815,7 @@
                 </a:solidFill>
                 <a:latin typeface="Calibri"/>
               </a:rPr>
-              <a:t>: cada amarillo y cada rojo con prioridad, acción concreta y evidencia de cierre.</a:t>
+              <a:t>, no el más fácil.</a:t>
             </a:r>
           </a:p>
           <a:p>
@@ -5767,7 +5840,7 @@
                 </a:solidFill>
                 <a:latin typeface="Calibri"/>
               </a:rPr>
-              <a:t>Consigna 3.</a:t>
+              <a:t>En clase, sin falta:</a:t>
             </a:r>
             <a:r>
               <a:rPr sz="1600" b="0" i="0">
@@ -5776,7 +5849,7 @@
                 </a:solidFill>
                 <a:latin typeface="Calibri"/>
               </a:rPr>
-              <a:t> Empiece aquí mismo a cerrar el gap de </a:t>
+              <a:t> los </a:t>
             </a:r>
             <a:r>
               <a:rPr sz="1600" b="1" i="0">
@@ -5785,7 +5858,7 @@
                 </a:solidFill>
                 <a:latin typeface="Calibri"/>
               </a:rPr>
-              <a:t>prioridad más alta</a:t>
+              <a:t>pasos 1 a 2</a:t>
             </a:r>
             <a:r>
               <a:rPr sz="1600" b="0" i="0">
@@ -5794,100 +5867,14 @@
                 </a:solidFill>
                 <a:latin typeface="Calibri"/>
               </a:rPr>
-              <a:t>, no el más fácil.</a:t>
-            </a:r>
-          </a:p>
-          <a:p>
-            <a:pPr>
-              <a:spcAft>
-                <a:spcPts val="1000"/>
-              </a:spcAft>
-            </a:pPr>
-            <a:r>
-              <a:rPr sz="1600" b="0" i="0">
-                <a:solidFill>
-                  <a:srgbClr val="2B2B2B"/>
-                </a:solidFill>
-                <a:latin typeface="Calibri"/>
-              </a:rPr>
-              <a:t>–   </a:t>
-            </a:r>
-            <a:r>
-              <a:rPr sz="1600" b="1" i="0">
-                <a:solidFill>
-                  <a:srgbClr val="2B2B2B"/>
-                </a:solidFill>
-                <a:latin typeface="Calibri"/>
-              </a:rPr>
-              <a:t>Criterio de éxito (verificable):</a:t>
-            </a:r>
-            <a:r>
-              <a:rPr sz="1600" b="0" i="0">
-                <a:solidFill>
-                  <a:srgbClr val="2B2B2B"/>
-                </a:solidFill>
-                <a:latin typeface="Calibri"/>
-              </a:rPr>
-              <a:t> el semáforo refleja el estado real sin autoengaño; ningún gap está escrito como 'mejorar X'; el gap de prioridad alta ya tiene avance visible en el documento.</a:t>
-            </a:r>
-          </a:p>
-          <a:p>
-            <a:pPr>
-              <a:spcAft>
-                <a:spcPts val="1000"/>
-              </a:spcAft>
-            </a:pPr>
-            <a:r>
-              <a:rPr sz="1600" b="0" i="0">
-                <a:solidFill>
-                  <a:srgbClr val="2B2B2B"/>
-                </a:solidFill>
-                <a:latin typeface="Calibri"/>
-              </a:rPr>
-              <a:t>–   </a:t>
-            </a:r>
-            <a:r>
-              <a:rPr sz="1600" b="1" i="0">
-                <a:solidFill>
-                  <a:srgbClr val="2B2B2B"/>
-                </a:solidFill>
-                <a:latin typeface="Calibri"/>
-              </a:rPr>
-              <a:t>Entrega:</a:t>
-            </a:r>
-            <a:r>
-              <a:rPr sz="1600" b="0" i="0">
-                <a:solidFill>
-                  <a:srgbClr val="2B2B2B"/>
-                </a:solidFill>
-                <a:latin typeface="Calibri"/>
-              </a:rPr>
-              <a:t> suba S09_Integracion_Apellido a </a:t>
-            </a:r>
-            <a:r>
-              <a:rPr sz="1600" b="1" i="0">
-                <a:solidFill>
-                  <a:srgbClr val="2B2B2B"/>
-                </a:solidFill>
-                <a:latin typeface="Calibri"/>
-              </a:rPr>
-              <a:t>CDigital</a:t>
-            </a:r>
-            <a:r>
-              <a:rPr sz="1600" b="0" i="0">
-                <a:solidFill>
-                  <a:srgbClr val="2B2B2B"/>
-                </a:solidFill>
-                <a:latin typeface="Calibri"/>
-              </a:rPr>
-              <a:t> — [URL CDigital — campus del curso pendiente].</a:t>
-            </a:r>
-          </a:p>
-        </p:txBody>
-      </p:sp>
-      <p:sp>
-        <p:nvSpPr>
-          <p:cNvPr id="5" name="TextBox 4"/>
+              <a:t>. Del 3 en adelante puede quedar en trabajo autónomo, pero antes de la próxima sesión.</a:t>
+            </a:r>
+          </a:p>
+        </p:txBody>
+      </p:sp>
+      <p:sp>
+        <p:nvSpPr>
+          <p:cNvPr id="6" name="TextBox 5"/>
           <p:cNvSpPr txBox="1"/>
           <p:nvPr/>
         </p:nvSpPr>
@@ -6020,7 +6007,7 @@
                 </a:solidFill>
                 <a:latin typeface="Calibri"/>
               </a:rPr>
-              <a:t>Checklist de autoevaluación antes de entregar</a:t>
+              <a:t>TALLER · cómo se revisa y dónde se entrega</a:t>
             </a:r>
           </a:p>
         </p:txBody>
@@ -6033,8 +6020,8 @@
         </p:nvSpPr>
         <p:spPr>
           <a:xfrm>
-            <a:off x="640080" y="1691639"/>
-            <a:ext cx="10911535" cy="4617720"/>
+            <a:off x="640080" y="1280160"/>
+            <a:ext cx="10911535" cy="411480"/>
           </a:xfrm>
           <a:prstGeom prst="rect">
             <a:avLst/>
@@ -6047,6 +6034,41 @@
           </a:bodyPr>
           <a:lstStyle/>
           <a:p>
+            <a:pPr algn="ctr"/>
+            <a:r>
+              <a:rPr sz="1500" b="0" i="0">
+                <a:solidFill>
+                  <a:srgbClr val="2B2B2B"/>
+                </a:solidFill>
+                <a:latin typeface="Calibri"/>
+              </a:rPr>
+              <a:t>Semáforo y matriz de gaps de su propio avance</a:t>
+            </a:r>
+          </a:p>
+        </p:txBody>
+      </p:sp>
+      <p:sp>
+        <p:nvSpPr>
+          <p:cNvPr id="5" name="TextBox 4"/>
+          <p:cNvSpPr txBox="1"/>
+          <p:nvPr/>
+        </p:nvSpPr>
+        <p:spPr>
+          <a:xfrm>
+            <a:off x="640080" y="2011679"/>
+            <a:ext cx="10911535" cy="4297680"/>
+          </a:xfrm>
+          <a:prstGeom prst="rect">
+            <a:avLst/>
+          </a:prstGeom>
+          <a:noFill/>
+        </p:spPr>
+        <p:txBody>
+          <a:bodyPr wrap="square" anchor="t" lIns="0" rIns="0" tIns="0" bIns="0">
+            <a:spAutoFit/>
+          </a:bodyPr>
+          <a:lstStyle/>
+          <a:p>
             <a:pPr>
               <a:spcAft>
                 <a:spcPts val="1000"/>
@@ -6059,7 +6081,127 @@
                 </a:solidFill>
                 <a:latin typeface="Calibri"/>
               </a:rPr>
-              <a:t>–   ¿Leí el documento completo de corrido, sin corregir mientras leía?</a:t>
+              <a:t>–   </a:t>
+            </a:r>
+            <a:r>
+              <a:rPr sz="1600" b="1" i="0">
+                <a:solidFill>
+                  <a:srgbClr val="2B2B2B"/>
+                </a:solidFill>
+                <a:latin typeface="Calibri"/>
+              </a:rPr>
+              <a:t>Quedó bien si</a:t>
+            </a:r>
+            <a:r>
+              <a:rPr sz="1600" b="0" i="0">
+                <a:solidFill>
+                  <a:srgbClr val="2B2B2B"/>
+                </a:solidFill>
+                <a:latin typeface="Calibri"/>
+              </a:rPr>
+              <a:t> —compruébelo usted antes de cerrar el documento—:</a:t>
+            </a:r>
+          </a:p>
+          <a:p>
+            <a:pPr lvl="1">
+              <a:spcAft>
+                <a:spcPts val="600"/>
+              </a:spcAft>
+            </a:pPr>
+            <a:r>
+              <a:rPr sz="1500" b="0" i="0">
+                <a:solidFill>
+                  <a:srgbClr val="2B2B2B"/>
+                </a:solidFill>
+                <a:latin typeface="Calibri"/>
+              </a:rPr>
+              <a:t>●   El semáforo refleja el </a:t>
+            </a:r>
+            <a:r>
+              <a:rPr sz="1500" b="1" i="0">
+                <a:solidFill>
+                  <a:srgbClr val="2B2B2B"/>
+                </a:solidFill>
+                <a:latin typeface="Calibri"/>
+              </a:rPr>
+              <a:t>estado real</a:t>
+            </a:r>
+            <a:r>
+              <a:rPr sz="1500" b="0" i="0">
+                <a:solidFill>
+                  <a:srgbClr val="2B2B2B"/>
+                </a:solidFill>
+                <a:latin typeface="Calibri"/>
+              </a:rPr>
+              <a:t>, sin autoengaño.</a:t>
+            </a:r>
+          </a:p>
+          <a:p>
+            <a:pPr lvl="1">
+              <a:spcAft>
+                <a:spcPts val="600"/>
+              </a:spcAft>
+            </a:pPr>
+            <a:r>
+              <a:rPr sz="1500" b="0" i="0">
+                <a:solidFill>
+                  <a:srgbClr val="2B2B2B"/>
+                </a:solidFill>
+                <a:latin typeface="Calibri"/>
+              </a:rPr>
+              <a:t>●   </a:t>
+            </a:r>
+            <a:r>
+              <a:rPr sz="1500" b="1" i="0">
+                <a:solidFill>
+                  <a:srgbClr val="2B2B2B"/>
+                </a:solidFill>
+                <a:latin typeface="Calibri"/>
+              </a:rPr>
+              <a:t>Ningún gap está escrito como «mejorar X»</a:t>
+            </a:r>
+            <a:r>
+              <a:rPr sz="1500" b="0" i="0">
+                <a:solidFill>
+                  <a:srgbClr val="2B2B2B"/>
+                </a:solidFill>
+                <a:latin typeface="Calibri"/>
+              </a:rPr>
+              <a:t>: todos dicen qué se hace.</a:t>
+            </a:r>
+          </a:p>
+          <a:p>
+            <a:pPr lvl="1">
+              <a:spcAft>
+                <a:spcPts val="600"/>
+              </a:spcAft>
+            </a:pPr>
+            <a:r>
+              <a:rPr sz="1500" b="0" i="0">
+                <a:solidFill>
+                  <a:srgbClr val="2B2B2B"/>
+                </a:solidFill>
+                <a:latin typeface="Calibri"/>
+              </a:rPr>
+              <a:t>●   El gap de prioridad alta ya tiene </a:t>
+            </a:r>
+            <a:r>
+              <a:rPr sz="1500" b="1" i="0">
+                <a:solidFill>
+                  <a:srgbClr val="2B2B2B"/>
+                </a:solidFill>
+                <a:latin typeface="Calibri"/>
+              </a:rPr>
+              <a:t>avance visible</a:t>
+            </a:r>
+            <a:r>
+              <a:rPr sz="1500" b="0" i="0">
+                <a:solidFill>
+                  <a:srgbClr val="2B2B2B"/>
+                </a:solidFill>
+                <a:latin typeface="Calibri"/>
+              </a:rPr>
+              <a:t> en el documento.</a:t>
             </a:r>
           </a:p>
           <a:p>
@@ -6075,7 +6217,61 @@
                 </a:solidFill>
                 <a:latin typeface="Calibri"/>
               </a:rPr>
-              <a:t>–   ¿Mi semáforo tiene al menos un amarillo o un rojo? (Si está todo verde, no fui honesto.)</a:t>
+              <a:t>–   </a:t>
+            </a:r>
+            <a:r>
+              <a:rPr sz="1600" b="1" i="0">
+                <a:solidFill>
+                  <a:srgbClr val="2B2B2B"/>
+                </a:solidFill>
+                <a:latin typeface="Calibri"/>
+              </a:rPr>
+              <a:t>Plan B:</a:t>
+            </a:r>
+            <a:r>
+              <a:rPr sz="1600" b="0" i="0">
+                <a:solidFill>
+                  <a:srgbClr val="2B2B2B"/>
+                </a:solidFill>
+                <a:latin typeface="Calibri"/>
+              </a:rPr>
+              <a:t> Si todo le parece amarillo, aplique una sola regla: rojo es lo que </a:t>
+            </a:r>
+            <a:r>
+              <a:rPr sz="1600" b="1" i="0">
+                <a:solidFill>
+                  <a:srgbClr val="2B2B2B"/>
+                </a:solidFill>
+                <a:latin typeface="Calibri"/>
+              </a:rPr>
+              <a:t>no existe</a:t>
+            </a:r>
+            <a:r>
+              <a:rPr sz="1600" b="0" i="0">
+                <a:solidFill>
+                  <a:srgbClr val="2B2B2B"/>
+                </a:solidFill>
+                <a:latin typeface="Calibri"/>
+              </a:rPr>
+              <a:t>, amarillo lo que existe pero </a:t>
+            </a:r>
+            <a:r>
+              <a:rPr sz="1600" b="1" i="0">
+                <a:solidFill>
+                  <a:srgbClr val="2B2B2B"/>
+                </a:solidFill>
+                <a:latin typeface="Calibri"/>
+              </a:rPr>
+              <a:t>no está alineado</a:t>
+            </a:r>
+            <a:r>
+              <a:rPr sz="1600" b="0" i="0">
+                <a:solidFill>
+                  <a:srgbClr val="2B2B2B"/>
+                </a:solidFill>
+                <a:latin typeface="Calibri"/>
+              </a:rPr>
+              <a:t> con la pregunta.</a:t>
             </a:r>
           </a:p>
           <a:p>
@@ -6091,7 +6287,43 @@
                 </a:solidFill>
                 <a:latin typeface="Calibri"/>
               </a:rPr>
-              <a:t>–   ¿Cada gap tiene prioridad, acción concreta y evidencia de cierre verificable?</a:t>
+              <a:t>–   </a:t>
+            </a:r>
+            <a:r>
+              <a:rPr sz="1600" b="1" i="0">
+                <a:solidFill>
+                  <a:srgbClr val="2B2B2B"/>
+                </a:solidFill>
+                <a:latin typeface="Calibri"/>
+              </a:rPr>
+              <a:t>Hoy no se sube nada al aula:</a:t>
+            </a:r>
+            <a:r>
+              <a:rPr sz="1600" b="0" i="0">
+                <a:solidFill>
+                  <a:srgbClr val="2B2B2B"/>
+                </a:solidFill>
+                <a:latin typeface="Calibri"/>
+              </a:rPr>
+              <a:t> guarde `S09_Integracion_Apellido` (Google Doc o PDF) en su Drive y tráigalo a la próxima sesión. Es un </a:t>
+            </a:r>
+            <a:r>
+              <a:rPr sz="1600" b="1" i="0">
+                <a:solidFill>
+                  <a:srgbClr val="2B2B2B"/>
+                </a:solidFill>
+                <a:latin typeface="Calibri"/>
+              </a:rPr>
+              <a:t>avance formativo</a:t>
+            </a:r>
+            <a:r>
+              <a:rPr sz="1600" b="0" i="0">
+                <a:solidFill>
+                  <a:srgbClr val="2B2B2B"/>
+                </a:solidFill>
+                <a:latin typeface="Calibri"/>
+              </a:rPr>
+              <a:t>, se revisa en clase.</a:t>
             </a:r>
           </a:p>
           <a:p>
@@ -6107,15 +6339,17 @@
                 </a:solidFill>
                 <a:latin typeface="Calibri"/>
               </a:rPr>
-              <a:t>–   ¿Verifiqué que el marco use los mismos constructos que aparecen en mis objetivos?</a:t>
-            </a:r>
-          </a:p>
-          <a:p>
-            <a:pPr>
-              <a:spcAft>
-                <a:spcPts val="1000"/>
-              </a:spcAft>
-            </a:pPr>
+              <a:t>–   </a:t>
+            </a:r>
+            <a:r>
+              <a:rPr sz="1600" b="1" i="0">
+                <a:solidFill>
+                  <a:srgbClr val="2B2B2B"/>
+                </a:solidFill>
+                <a:latin typeface="Calibri"/>
+              </a:rPr>
+              <a:t>Esto alimenta:</a:t>
+            </a:r>
             <a:r>
               <a:rPr sz="1600" b="0" i="0">
                 <a:solidFill>
@@ -6123,15 +6357,17 @@
                 </a:solidFill>
                 <a:latin typeface="Calibri"/>
               </a:rPr>
-              <a:t>–   ¿La matriz metodológica tiene exactamente tantas filas como objetivos específicos?</a:t>
-            </a:r>
-          </a:p>
-          <a:p>
-            <a:pPr>
-              <a:spcAft>
-                <a:spcPts val="1000"/>
-              </a:spcAft>
-            </a:pPr>
+              <a:t> </a:t>
+            </a:r>
+            <a:r>
+              <a:rPr sz="1600" b="1" i="0">
+                <a:solidFill>
+                  <a:srgbClr val="2B2B2B"/>
+                </a:solidFill>
+                <a:latin typeface="Calibri"/>
+              </a:rPr>
+              <a:t>ACA Final</a:t>
+            </a:r>
             <a:r>
               <a:rPr sz="1600" b="0" i="0">
                 <a:solidFill>
@@ -6139,15 +6375,17 @@
                 </a:solidFill>
                 <a:latin typeface="Calibri"/>
               </a:rPr>
-              <a:t>–   ¿Toda cita del cuerpo tiene su referencia y toda referencia fue citada?</a:t>
-            </a:r>
-          </a:p>
-          <a:p>
-            <a:pPr>
-              <a:spcAft>
-                <a:spcPts val="1000"/>
-              </a:spcAft>
-            </a:pPr>
+              <a:t> —tarea, 32,8%—, el documento que </a:t>
+            </a:r>
+            <a:r>
+              <a:rPr sz="1600" b="1" i="0">
+                <a:solidFill>
+                  <a:srgbClr val="2B2B2B"/>
+                </a:solidFill>
+                <a:latin typeface="Calibri"/>
+              </a:rPr>
+              <a:t>sí</a:t>
+            </a:r>
             <a:r>
               <a:rPr sz="1600" b="0" i="0">
                 <a:solidFill>
@@ -6155,15 +6393,17 @@
                 </a:solidFill>
                 <a:latin typeface="Calibri"/>
               </a:rPr>
-              <a:t>–   ¿Ataqué primero un rojo estructural en vez de la ortografía?</a:t>
-            </a:r>
-          </a:p>
-          <a:p>
-            <a:pPr>
-              <a:spcAft>
-                <a:spcPts val="1000"/>
-              </a:spcAft>
-            </a:pPr>
+              <a:t> recibe </a:t>
+            </a:r>
+            <a:r>
+              <a:rPr sz="1600" b="1" i="0">
+                <a:solidFill>
+                  <a:srgbClr val="2B2B2B"/>
+                </a:solidFill>
+                <a:latin typeface="Calibri"/>
+              </a:rPr>
+              <a:t>CDigital</a:t>
+            </a:r>
             <a:r>
               <a:rPr sz="1600" b="0" i="0">
                 <a:solidFill>
@@ -6171,14 +6411,32 @@
                 </a:solidFill>
                 <a:latin typeface="Calibri"/>
               </a:rPr>
-              <a:t>–   ¿El documento consolidado tiene estilos aplicados e índice automático?</a:t>
-            </a:r>
-          </a:p>
-        </p:txBody>
-      </p:sp>
-      <p:sp>
-        <p:nvSpPr>
-          <p:cNvPr id="5" name="TextBox 4"/>
+              <a:t>; cierra en la semana de la </a:t>
+            </a:r>
+            <a:r>
+              <a:rPr sz="1600" b="1" i="0">
+                <a:solidFill>
+                  <a:srgbClr val="2B2B2B"/>
+                </a:solidFill>
+                <a:latin typeface="Calibri"/>
+              </a:rPr>
+              <a:t>Sesión 11</a:t>
+            </a:r>
+            <a:r>
+              <a:rPr sz="1600" b="0" i="0">
+                <a:solidFill>
+                  <a:srgbClr val="2B2B2B"/>
+                </a:solidFill>
+                <a:latin typeface="Calibri"/>
+              </a:rPr>
+              <a:t>.</a:t>
+            </a:r>
+          </a:p>
+        </p:txBody>
+      </p:sp>
+      <p:sp>
+        <p:nvSpPr>
+          <p:cNvPr id="6" name="TextBox 5"/>
           <p:cNvSpPr txBox="1"/>
           <p:nvPr/>
         </p:nvSpPr>
@@ -6311,7 +6569,7 @@
                 </a:solidFill>
                 <a:latin typeface="Calibri"/>
               </a:rPr>
-              <a:t>Para continuar (trabajo autónomo)</a:t>
+              <a:t>Checklist de autoevaluación antes de entregar</a:t>
             </a:r>
           </a:p>
         </p:txBody>
@@ -6350,7 +6608,7 @@
                 </a:solidFill>
                 <a:latin typeface="Calibri"/>
               </a:rPr>
-              <a:t>–   Suba S09_Integracion_Apellido con el semáforo y la matriz de gaps completos.</a:t>
+              <a:t>–   ¿Leí el documento completo de corrido, sin corregir mientras leía?</a:t>
             </a:r>
           </a:p>
           <a:p>
@@ -6366,25 +6624,7 @@
                 </a:solidFill>
                 <a:latin typeface="Calibri"/>
               </a:rPr>
-              <a:t>–   Cierre durante la semana </a:t>
-            </a:r>
-            <a:r>
-              <a:rPr sz="1600" b="1" i="0">
-                <a:solidFill>
-                  <a:srgbClr val="2B2B2B"/>
-                </a:solidFill>
-                <a:latin typeface="Calibri"/>
-              </a:rPr>
-              <a:t>todos los gaps de prioridad alta</a:t>
-            </a:r>
-            <a:r>
-              <a:rPr sz="1600" b="0" i="0">
-                <a:solidFill>
-                  <a:srgbClr val="2B2B2B"/>
-                </a:solidFill>
-                <a:latin typeface="Calibri"/>
-              </a:rPr>
-              <a:t>; deje los bajos para el final del periodo.</a:t>
+              <a:t>–   ¿Mi semáforo tiene al menos un amarillo o un rojo? (Si está todo verde, no fui honesto.)</a:t>
             </a:r>
           </a:p>
           <a:p>
@@ -6400,7 +6640,7 @@
                 </a:solidFill>
                 <a:latin typeface="Calibri"/>
               </a:rPr>
-              <a:t>–   Cada vez que cierre uno, cambie su color en el semáforo: verá el avance real y eso sostiene la motivación.</a:t>
+              <a:t>–   ¿Cada gap tiene prioridad, acción concreta y evidencia de cierre verificable?</a:t>
             </a:r>
           </a:p>
           <a:p>
@@ -6416,7 +6656,7 @@
                 </a:solidFill>
                 <a:latin typeface="Calibri"/>
               </a:rPr>
-              <a:t>–   Pídale a un compañero la prueba del extraño: que le diga en una frase qué hace su proyecto.</a:t>
+              <a:t>–   ¿Verifiqué que el marco use los mismos constructos que aparecen en mis objetivos?</a:t>
             </a:r>
           </a:p>
           <a:p>
@@ -6432,77 +6672,55 @@
                 </a:solidFill>
                 <a:latin typeface="Calibri"/>
               </a:rPr>
-              <a:t>–   </a:t>
-            </a:r>
-            <a:r>
-              <a:rPr sz="1600" b="1" i="0">
-                <a:solidFill>
-                  <a:srgbClr val="2B2B2B"/>
-                </a:solidFill>
-                <a:latin typeface="Calibri"/>
-              </a:rPr>
-              <a:t>Próxima sesión:</a:t>
-            </a:r>
-            <a:r>
-              <a:rPr sz="1600" b="0" i="0">
-                <a:solidFill>
-                  <a:srgbClr val="2B2B2B"/>
-                </a:solidFill>
-                <a:latin typeface="Calibri"/>
-              </a:rPr>
-              <a:t> cambiamos de modo — </a:t>
-            </a:r>
-            <a:r>
-              <a:rPr sz="1600" b="1" i="0">
-                <a:solidFill>
-                  <a:srgbClr val="2B2B2B"/>
-                </a:solidFill>
-                <a:latin typeface="Calibri"/>
-              </a:rPr>
-              <a:t>socialización de avances</a:t>
-            </a:r>
-            <a:r>
-              <a:rPr sz="1600" b="0" i="0">
-                <a:solidFill>
-                  <a:srgbClr val="2B2B2B"/>
-                </a:solidFill>
-                <a:latin typeface="Calibri"/>
-              </a:rPr>
-              <a:t>. Va a contar su proyecto en tres minutos y a dar y recibir retroalimentación.</a:t>
-            </a:r>
-          </a:p>
-          <a:p>
-            <a:pPr lvl="1">
+              <a:t>–   ¿La matriz metodológica tiene exactamente tantas filas como objetivos específicos?</a:t>
+            </a:r>
+          </a:p>
+          <a:p>
+            <a:pPr>
               <a:spcAft>
-                <a:spcPts val="600"/>
+                <a:spcPts val="1000"/>
               </a:spcAft>
             </a:pPr>
             <a:r>
-              <a:rPr sz="1500" b="0" i="0">
-                <a:solidFill>
-                  <a:srgbClr val="2B2B2B"/>
-                </a:solidFill>
-                <a:latin typeface="Calibri"/>
-              </a:rPr>
-              <a:t>●   Llegue con el documento a la mano y con claro </a:t>
-            </a:r>
-            <a:r>
-              <a:rPr sz="1500" b="1" i="0">
-                <a:solidFill>
-                  <a:srgbClr val="2B2B2B"/>
-                </a:solidFill>
-                <a:latin typeface="Calibri"/>
-              </a:rPr>
-              <a:t>en qué quiere que le ayuden</a:t>
-            </a:r>
-            <a:r>
-              <a:rPr sz="1500" b="0" i="0">
-                <a:solidFill>
-                  <a:srgbClr val="2B2B2B"/>
-                </a:solidFill>
-                <a:latin typeface="Calibri"/>
-              </a:rPr>
-              <a:t>: ese pedido es parte del ejercicio.</a:t>
+              <a:rPr sz="1600" b="0" i="0">
+                <a:solidFill>
+                  <a:srgbClr val="2B2B2B"/>
+                </a:solidFill>
+                <a:latin typeface="Calibri"/>
+              </a:rPr>
+              <a:t>–   ¿Toda cita del cuerpo tiene su referencia y toda referencia fue citada?</a:t>
+            </a:r>
+          </a:p>
+          <a:p>
+            <a:pPr>
+              <a:spcAft>
+                <a:spcPts val="1000"/>
+              </a:spcAft>
+            </a:pPr>
+            <a:r>
+              <a:rPr sz="1600" b="0" i="0">
+                <a:solidFill>
+                  <a:srgbClr val="2B2B2B"/>
+                </a:solidFill>
+                <a:latin typeface="Calibri"/>
+              </a:rPr>
+              <a:t>–   ¿Ataqué primero un rojo estructural en vez de la ortografía?</a:t>
+            </a:r>
+          </a:p>
+          <a:p>
+            <a:pPr>
+              <a:spcAft>
+                <a:spcPts val="1000"/>
+              </a:spcAft>
+            </a:pPr>
+            <a:r>
+              <a:rPr sz="1600" b="0" i="0">
+                <a:solidFill>
+                  <a:srgbClr val="2B2B2B"/>
+                </a:solidFill>
+                <a:latin typeface="Calibri"/>
+              </a:rPr>
+              <a:t>–   ¿El documento consolidado tiene estilos aplicados e índice automático?</a:t>
             </a:r>
           </a:p>
         </p:txBody>
@@ -6551,6 +6769,1944 @@
 </file>
 
 <file path=ppt/slides/slide18.xml><?xml version="1.0" encoding="utf-8"?>
+<p:sld xmlns:a="http://schemas.openxmlformats.org/drawingml/2006/main" xmlns:p="http://schemas.openxmlformats.org/presentationml/2006/main" xmlns:r="http://schemas.openxmlformats.org/officeDocument/2006/relationships">
+  <p:cSld>
+    <p:bg>
+      <p:bgPr>
+        <a:solidFill>
+          <a:srgbClr val="FFFFFF"/>
+        </a:solidFill>
+        <a:effectLst/>
+      </p:bgPr>
+    </p:bg>
+    <p:spTree>
+      <p:nvGrpSpPr>
+        <p:cNvPr id="1" name=""/>
+        <p:cNvGrpSpPr/>
+        <p:nvPr/>
+      </p:nvGrpSpPr>
+      <p:grpSpPr/>
+      <p:sp>
+        <p:nvSpPr>
+          <p:cNvPr id="2" name="Rectangle 1"/>
+          <p:cNvSpPr/>
+          <p:nvPr/>
+        </p:nvSpPr>
+        <p:spPr>
+          <a:xfrm>
+            <a:off x="0" y="0"/>
+            <a:ext cx="12191695" cy="1188720"/>
+          </a:xfrm>
+          <a:prstGeom prst="rect">
+            <a:avLst/>
+          </a:prstGeom>
+          <a:solidFill>
+            <a:srgbClr val="0C2340"/>
+          </a:solidFill>
+          <a:ln>
+            <a:noFill/>
+          </a:ln>
+          <a:effectLst/>
+        </p:spPr>
+        <p:style>
+          <a:lnRef idx="1">
+            <a:schemeClr val="accent1"/>
+          </a:lnRef>
+          <a:fillRef idx="3">
+            <a:schemeClr val="accent1"/>
+          </a:fillRef>
+          <a:effectRef idx="2">
+            <a:schemeClr val="accent1"/>
+          </a:effectRef>
+          <a:fontRef idx="minor">
+            <a:schemeClr val="lt1"/>
+          </a:fontRef>
+        </p:style>
+        <p:txBody>
+          <a:bodyPr rtlCol="0" anchor="ctr"/>
+          <a:lstStyle/>
+          <a:p>
+            <a:pPr algn="ctr"/>
+          </a:p>
+        </p:txBody>
+      </p:sp>
+      <p:sp>
+        <p:nvSpPr>
+          <p:cNvPr id="3" name="TextBox 2"/>
+          <p:cNvSpPr txBox="1"/>
+          <p:nvPr/>
+        </p:nvSpPr>
+        <p:spPr>
+          <a:xfrm>
+            <a:off x="640080" y="0"/>
+            <a:ext cx="9082735" cy="1188720"/>
+          </a:xfrm>
+          <a:prstGeom prst="rect">
+            <a:avLst/>
+          </a:prstGeom>
+          <a:noFill/>
+        </p:spPr>
+        <p:txBody>
+          <a:bodyPr wrap="square" anchor="ctr" lIns="0" rIns="0" tIns="0" bIns="0">
+            <a:spAutoFit/>
+          </a:bodyPr>
+          <a:lstStyle/>
+          <a:p>
+            <a:pPr algn="ctr"/>
+            <a:r>
+              <a:rPr sz="2600" b="1" i="0">
+                <a:solidFill>
+                  <a:srgbClr val="FFFFFF"/>
+                </a:solidFill>
+                <a:latin typeface="Calibri"/>
+              </a:rPr>
+              <a:t>Para continuar (trabajo autónomo)</a:t>
+            </a:r>
+          </a:p>
+        </p:txBody>
+      </p:sp>
+      <p:sp>
+        <p:nvSpPr>
+          <p:cNvPr id="4" name="TextBox 3"/>
+          <p:cNvSpPr txBox="1"/>
+          <p:nvPr/>
+        </p:nvSpPr>
+        <p:spPr>
+          <a:xfrm>
+            <a:off x="640080" y="1691639"/>
+            <a:ext cx="10911535" cy="4617720"/>
+          </a:xfrm>
+          <a:prstGeom prst="rect">
+            <a:avLst/>
+          </a:prstGeom>
+          <a:noFill/>
+        </p:spPr>
+        <p:txBody>
+          <a:bodyPr wrap="square" anchor="t" lIns="0" rIns="0" tIns="0" bIns="0">
+            <a:spAutoFit/>
+          </a:bodyPr>
+          <a:lstStyle/>
+          <a:p>
+            <a:pPr>
+              <a:spcAft>
+                <a:spcPts val="1000"/>
+              </a:spcAft>
+            </a:pPr>
+            <a:r>
+              <a:rPr sz="1600" b="0" i="0">
+                <a:solidFill>
+                  <a:srgbClr val="2B2B2B"/>
+                </a:solidFill>
+                <a:latin typeface="Calibri"/>
+              </a:rPr>
+              <a:t>–   Suba S09_Integracion_Apellido con el semáforo y la matriz de gaps completos.</a:t>
+            </a:r>
+          </a:p>
+          <a:p>
+            <a:pPr>
+              <a:spcAft>
+                <a:spcPts val="1000"/>
+              </a:spcAft>
+            </a:pPr>
+            <a:r>
+              <a:rPr sz="1600" b="0" i="0">
+                <a:solidFill>
+                  <a:srgbClr val="2B2B2B"/>
+                </a:solidFill>
+                <a:latin typeface="Calibri"/>
+              </a:rPr>
+              <a:t>–   Cierre durante la semana </a:t>
+            </a:r>
+            <a:r>
+              <a:rPr sz="1600" b="1" i="0">
+                <a:solidFill>
+                  <a:srgbClr val="2B2B2B"/>
+                </a:solidFill>
+                <a:latin typeface="Calibri"/>
+              </a:rPr>
+              <a:t>todos los gaps de prioridad alta</a:t>
+            </a:r>
+            <a:r>
+              <a:rPr sz="1600" b="0" i="0">
+                <a:solidFill>
+                  <a:srgbClr val="2B2B2B"/>
+                </a:solidFill>
+                <a:latin typeface="Calibri"/>
+              </a:rPr>
+              <a:t>; deje los bajos para el final del periodo.</a:t>
+            </a:r>
+          </a:p>
+          <a:p>
+            <a:pPr>
+              <a:spcAft>
+                <a:spcPts val="1000"/>
+              </a:spcAft>
+            </a:pPr>
+            <a:r>
+              <a:rPr sz="1600" b="0" i="0">
+                <a:solidFill>
+                  <a:srgbClr val="2B2B2B"/>
+                </a:solidFill>
+                <a:latin typeface="Calibri"/>
+              </a:rPr>
+              <a:t>–   Cada vez que cierre uno, cambie su color en el semáforo: verá el avance real y eso sostiene la motivación.</a:t>
+            </a:r>
+          </a:p>
+          <a:p>
+            <a:pPr>
+              <a:spcAft>
+                <a:spcPts val="1000"/>
+              </a:spcAft>
+            </a:pPr>
+            <a:r>
+              <a:rPr sz="1600" b="0" i="0">
+                <a:solidFill>
+                  <a:srgbClr val="2B2B2B"/>
+                </a:solidFill>
+                <a:latin typeface="Calibri"/>
+              </a:rPr>
+              <a:t>–   Pídale a un compañero la prueba del extraño: que le diga en una frase qué hace su proyecto.</a:t>
+            </a:r>
+          </a:p>
+          <a:p>
+            <a:pPr>
+              <a:spcAft>
+                <a:spcPts val="1000"/>
+              </a:spcAft>
+            </a:pPr>
+            <a:r>
+              <a:rPr sz="1600" b="0" i="0">
+                <a:solidFill>
+                  <a:srgbClr val="2B2B2B"/>
+                </a:solidFill>
+                <a:latin typeface="Calibri"/>
+              </a:rPr>
+              <a:t>–   </a:t>
+            </a:r>
+            <a:r>
+              <a:rPr sz="1600" b="1" i="0">
+                <a:solidFill>
+                  <a:srgbClr val="2B2B2B"/>
+                </a:solidFill>
+                <a:latin typeface="Calibri"/>
+              </a:rPr>
+              <a:t>Próxima sesión:</a:t>
+            </a:r>
+            <a:r>
+              <a:rPr sz="1600" b="0" i="0">
+                <a:solidFill>
+                  <a:srgbClr val="2B2B2B"/>
+                </a:solidFill>
+                <a:latin typeface="Calibri"/>
+              </a:rPr>
+              <a:t> cambiamos de modo — </a:t>
+            </a:r>
+            <a:r>
+              <a:rPr sz="1600" b="1" i="0">
+                <a:solidFill>
+                  <a:srgbClr val="2B2B2B"/>
+                </a:solidFill>
+                <a:latin typeface="Calibri"/>
+              </a:rPr>
+              <a:t>socialización de avances</a:t>
+            </a:r>
+            <a:r>
+              <a:rPr sz="1600" b="0" i="0">
+                <a:solidFill>
+                  <a:srgbClr val="2B2B2B"/>
+                </a:solidFill>
+                <a:latin typeface="Calibri"/>
+              </a:rPr>
+              <a:t>. Va a contar su proyecto en tres minutos y a dar y recibir retroalimentación.</a:t>
+            </a:r>
+          </a:p>
+          <a:p>
+            <a:pPr lvl="1">
+              <a:spcAft>
+                <a:spcPts val="600"/>
+              </a:spcAft>
+            </a:pPr>
+            <a:r>
+              <a:rPr sz="1500" b="0" i="0">
+                <a:solidFill>
+                  <a:srgbClr val="2B2B2B"/>
+                </a:solidFill>
+                <a:latin typeface="Calibri"/>
+              </a:rPr>
+              <a:t>●   Llegue con el documento a la mano y con claro </a:t>
+            </a:r>
+            <a:r>
+              <a:rPr sz="1500" b="1" i="0">
+                <a:solidFill>
+                  <a:srgbClr val="2B2B2B"/>
+                </a:solidFill>
+                <a:latin typeface="Calibri"/>
+              </a:rPr>
+              <a:t>en qué quiere que le ayuden</a:t>
+            </a:r>
+            <a:r>
+              <a:rPr sz="1500" b="0" i="0">
+                <a:solidFill>
+                  <a:srgbClr val="2B2B2B"/>
+                </a:solidFill>
+                <a:latin typeface="Calibri"/>
+              </a:rPr>
+              <a:t>: ese pedido es parte del ejercicio.</a:t>
+            </a:r>
+          </a:p>
+        </p:txBody>
+      </p:sp>
+      <p:sp>
+        <p:nvSpPr>
+          <p:cNvPr id="5" name="TextBox 4"/>
+          <p:cNvSpPr txBox="1"/>
+          <p:nvPr/>
+        </p:nvSpPr>
+        <p:spPr>
+          <a:xfrm>
+            <a:off x="11094415" y="6446520"/>
+            <a:ext cx="548640" cy="274320"/>
+          </a:xfrm>
+          <a:prstGeom prst="rect">
+            <a:avLst/>
+          </a:prstGeom>
+          <a:noFill/>
+        </p:spPr>
+        <p:txBody>
+          <a:bodyPr wrap="square" anchor="t" lIns="0" rIns="0" tIns="0" bIns="0">
+            <a:spAutoFit/>
+          </a:bodyPr>
+          <a:lstStyle/>
+          <a:p>
+            <a:pPr algn="r"/>
+            <a:r>
+              <a:rPr sz="1000" b="1" i="0">
+                <a:solidFill>
+                  <a:srgbClr val="8F989D"/>
+                </a:solidFill>
+                <a:latin typeface="Calibri"/>
+              </a:rPr>
+              <a:t>18</a:t>
+            </a:r>
+          </a:p>
+        </p:txBody>
+      </p:sp>
+    </p:spTree>
+  </p:cSld>
+  <p:clrMapOvr>
+    <a:masterClrMapping/>
+  </p:clrMapOvr>
+</p:sld>
+</file>
+
+<file path=ppt/slides/slide19.xml><?xml version="1.0" encoding="utf-8"?>
+<p:sld xmlns:a="http://schemas.openxmlformats.org/drawingml/2006/main" xmlns:p="http://schemas.openxmlformats.org/presentationml/2006/main" xmlns:r="http://schemas.openxmlformats.org/officeDocument/2006/relationships">
+  <p:cSld>
+    <p:bg>
+      <p:bgPr>
+        <a:solidFill>
+          <a:srgbClr val="FFFFFF"/>
+        </a:solidFill>
+        <a:effectLst/>
+      </p:bgPr>
+    </p:bg>
+    <p:spTree>
+      <p:nvGrpSpPr>
+        <p:cNvPr id="1" name=""/>
+        <p:cNvGrpSpPr/>
+        <p:nvPr/>
+      </p:nvGrpSpPr>
+      <p:grpSpPr/>
+      <p:sp>
+        <p:nvSpPr>
+          <p:cNvPr id="2" name="Rectangle 1"/>
+          <p:cNvSpPr/>
+          <p:nvPr/>
+        </p:nvSpPr>
+        <p:spPr>
+          <a:xfrm>
+            <a:off x="0" y="0"/>
+            <a:ext cx="12191695" cy="1188720"/>
+          </a:xfrm>
+          <a:prstGeom prst="rect">
+            <a:avLst/>
+          </a:prstGeom>
+          <a:solidFill>
+            <a:srgbClr val="0C2340"/>
+          </a:solidFill>
+          <a:ln>
+            <a:noFill/>
+          </a:ln>
+          <a:effectLst/>
+        </p:spPr>
+        <p:style>
+          <a:lnRef idx="1">
+            <a:schemeClr val="accent1"/>
+          </a:lnRef>
+          <a:fillRef idx="3">
+            <a:schemeClr val="accent1"/>
+          </a:fillRef>
+          <a:effectRef idx="2">
+            <a:schemeClr val="accent1"/>
+          </a:effectRef>
+          <a:fontRef idx="minor">
+            <a:schemeClr val="lt1"/>
+          </a:fontRef>
+        </p:style>
+        <p:txBody>
+          <a:bodyPr rtlCol="0" anchor="ctr"/>
+          <a:lstStyle/>
+          <a:p>
+            <a:pPr algn="ctr"/>
+          </a:p>
+        </p:txBody>
+      </p:sp>
+      <p:sp>
+        <p:nvSpPr>
+          <p:cNvPr id="3" name="TextBox 2"/>
+          <p:cNvSpPr txBox="1"/>
+          <p:nvPr/>
+        </p:nvSpPr>
+        <p:spPr>
+          <a:xfrm>
+            <a:off x="640080" y="0"/>
+            <a:ext cx="9082735" cy="1188720"/>
+          </a:xfrm>
+          <a:prstGeom prst="rect">
+            <a:avLst/>
+          </a:prstGeom>
+          <a:noFill/>
+        </p:spPr>
+        <p:txBody>
+          <a:bodyPr wrap="square" anchor="ctr" lIns="0" rIns="0" tIns="0" bIns="0">
+            <a:spAutoFit/>
+          </a:bodyPr>
+          <a:lstStyle/>
+          <a:p>
+            <a:pPr algn="ctr"/>
+            <a:r>
+              <a:rPr sz="2600" b="1" i="0">
+                <a:solidFill>
+                  <a:srgbClr val="FFFFFF"/>
+                </a:solidFill>
+                <a:latin typeface="Calibri"/>
+              </a:rPr>
+              <a:t>RUTA DE ENTREGABLES DEL CURSO</a:t>
+            </a:r>
+          </a:p>
+        </p:txBody>
+      </p:sp>
+      <p:sp>
+        <p:nvSpPr>
+          <p:cNvPr id="4" name="TextBox 3"/>
+          <p:cNvSpPr txBox="1"/>
+          <p:nvPr/>
+        </p:nvSpPr>
+        <p:spPr>
+          <a:xfrm>
+            <a:off x="640080" y="1280160"/>
+            <a:ext cx="10911535" cy="411480"/>
+          </a:xfrm>
+          <a:prstGeom prst="rect">
+            <a:avLst/>
+          </a:prstGeom>
+          <a:noFill/>
+        </p:spPr>
+        <p:txBody>
+          <a:bodyPr wrap="square" anchor="t" lIns="0" rIns="0" tIns="0" bIns="0">
+            <a:spAutoFit/>
+          </a:bodyPr>
+          <a:lstStyle/>
+          <a:p>
+            <a:pPr algn="ctr"/>
+            <a:r>
+              <a:rPr sz="1500" b="0" i="0">
+                <a:solidFill>
+                  <a:srgbClr val="2B2B2B"/>
+                </a:solidFill>
+                <a:latin typeface="Calibri"/>
+              </a:rPr>
+              <a:t>Sin fechas a propósito: aquí va </a:t>
+            </a:r>
+            <a:r>
+              <a:rPr sz="1500" b="1" i="0">
+                <a:solidFill>
+                  <a:srgbClr val="2B2B2B"/>
+                </a:solidFill>
+                <a:latin typeface="Calibri"/>
+              </a:rPr>
+              <a:t>en qué punto del curso</a:t>
+            </a:r>
+            <a:r>
+              <a:rPr sz="1500" b="0" i="0">
+                <a:solidFill>
+                  <a:srgbClr val="2B2B2B"/>
+                </a:solidFill>
+                <a:latin typeface="Calibri"/>
+              </a:rPr>
+              <a:t> cierra cada ítem · la ventana exacta la fija CDigital</a:t>
+            </a:r>
+          </a:p>
+        </p:txBody>
+      </p:sp>
+      <p:graphicFrame>
+        <p:nvGraphicFramePr>
+          <p:cNvPr id="5" name="Table 4"/>
+          <p:cNvGraphicFramePr>
+            <a:graphicFrameLocks noGrp="1"/>
+          </p:cNvGraphicFramePr>
+          <p:nvPr/>
+        </p:nvGraphicFramePr>
+        <p:xfrm>
+          <a:off x="640080" y="2011679"/>
+          <a:ext cx="10911533" cy="4297680"/>
+        </p:xfrm>
+        <a:graphic>
+          <a:graphicData uri="http://schemas.openxmlformats.org/drawingml/2006/table">
+            <a:tbl>
+              <a:tblPr>
+                <a:tableStyleId>{2D5ABB26-0587-4C30-8999-92F81FD0307C}</a:tableStyleId>
+              </a:tblPr>
+              <a:tblGrid>
+                <a:gridCol w="2659113"/>
+                <a:gridCol w="2659113"/>
+                <a:gridCol w="5593307"/>
+              </a:tblGrid>
+              <a:tr h="477520">
+                <a:tc>
+                  <a:txBody>
+                    <a:bodyPr/>
+                    <a:lstStyle/>
+                    <a:p>
+                      <a:pPr algn="l"/>
+                      <a:r>
+                        <a:rPr sz="1300" b="1" i="0">
+                          <a:solidFill>
+                            <a:srgbClr val="FFFFFF"/>
+                          </a:solidFill>
+                          <a:latin typeface="Calibri"/>
+                        </a:rPr>
+                        <a:t>Cierra en la semana de…</a:t>
+                      </a:r>
+                    </a:p>
+                  </a:txBody>
+                  <a:tcPr anchor="ctr" marL="109728" marR="91440" marT="36576" marB="36576">
+                    <a:solidFill>
+                      <a:srgbClr val="0C2340"/>
+                    </a:solidFill>
+                  </a:tcPr>
+                </a:tc>
+                <a:tc>
+                  <a:txBody>
+                    <a:bodyPr/>
+                    <a:lstStyle/>
+                    <a:p>
+                      <a:pPr algn="l"/>
+                      <a:r>
+                        <a:rPr sz="1300" b="1" i="0">
+                          <a:solidFill>
+                            <a:srgbClr val="FFFFFF"/>
+                          </a:solidFill>
+                          <a:latin typeface="Calibri"/>
+                        </a:rPr>
+                        <a:t>Entregable</a:t>
+                      </a:r>
+                    </a:p>
+                  </a:txBody>
+                  <a:tcPr anchor="ctr" marL="109728" marR="91440" marT="36576" marB="36576">
+                    <a:solidFill>
+                      <a:srgbClr val="0C2340"/>
+                    </a:solidFill>
+                  </a:tcPr>
+                </a:tc>
+                <a:tc>
+                  <a:txBody>
+                    <a:bodyPr/>
+                    <a:lstStyle/>
+                    <a:p>
+                      <a:pPr algn="l"/>
+                      <a:r>
+                        <a:rPr sz="1300" b="1" i="0">
+                          <a:solidFill>
+                            <a:srgbClr val="FFFFFF"/>
+                          </a:solidFill>
+                          <a:latin typeface="Calibri"/>
+                        </a:rPr>
+                        <a:t>Qué debes tener listo</a:t>
+                      </a:r>
+                    </a:p>
+                  </a:txBody>
+                  <a:tcPr anchor="ctr" marL="109728" marR="91440" marT="36576" marB="36576">
+                    <a:solidFill>
+                      <a:srgbClr val="0C2340"/>
+                    </a:solidFill>
+                  </a:tcPr>
+                </a:tc>
+              </a:tr>
+              <a:tr h="477520">
+                <a:tc>
+                  <a:txBody>
+                    <a:bodyPr/>
+                    <a:lstStyle/>
+                    <a:p>
+                      <a:pPr algn="l"/>
+                      <a:r>
+                        <a:rPr sz="1100" b="1" i="0">
+                          <a:solidFill>
+                            <a:srgbClr val="2B2B2B"/>
+                          </a:solidFill>
+                          <a:latin typeface="Calibri"/>
+                        </a:rPr>
+                        <a:t>Sesión 03</a:t>
+                      </a:r>
+                      <a:r>
+                        <a:rPr sz="1100" b="0" i="0">
+                          <a:solidFill>
+                            <a:srgbClr val="2B2B2B"/>
+                          </a:solidFill>
+                          <a:latin typeface="Calibri"/>
+                        </a:rPr>
+                        <a:t> · ya cerró</a:t>
+                      </a:r>
+                    </a:p>
+                  </a:txBody>
+                  <a:tcPr anchor="ctr" marL="109728" marR="91440" marT="36576" marB="36576">
+                    <a:solidFill>
+                      <a:srgbClr val="FFFFFF"/>
+                    </a:solidFill>
+                  </a:tcPr>
+                </a:tc>
+                <a:tc>
+                  <a:txBody>
+                    <a:bodyPr/>
+                    <a:lstStyle/>
+                    <a:p>
+                      <a:pPr algn="l"/>
+                      <a:r>
+                        <a:rPr sz="1100" b="1" i="0">
+                          <a:solidFill>
+                            <a:srgbClr val="2B2B2B"/>
+                          </a:solidFill>
+                          <a:latin typeface="Calibri"/>
+                        </a:rPr>
+                        <a:t>Quiz 1</a:t>
+                      </a:r>
+                      <a:r>
+                        <a:rPr sz="1100" b="0" i="0">
+                          <a:solidFill>
+                            <a:srgbClr val="2B2B2B"/>
+                          </a:solidFill>
+                          <a:latin typeface="Calibri"/>
+                        </a:rPr>
+                        <a:t> · Cuestionario · 6%</a:t>
+                      </a:r>
+                    </a:p>
+                  </a:txBody>
+                  <a:tcPr anchor="ctr" marL="109728" marR="91440" marT="36576" marB="36576">
+                    <a:solidFill>
+                      <a:srgbClr val="FFFFFF"/>
+                    </a:solidFill>
+                  </a:tcPr>
+                </a:tc>
+                <a:tc>
+                  <a:txBody>
+                    <a:bodyPr/>
+                    <a:lstStyle/>
+                    <a:p>
+                      <a:pPr algn="l"/>
+                      <a:r>
+                        <a:rPr sz="1100" b="0" i="0">
+                          <a:solidFill>
+                            <a:srgbClr val="2B2B2B"/>
+                          </a:solidFill>
+                          <a:latin typeface="Calibri"/>
+                        </a:rPr>
+                        <a:t>Ten formulados </a:t>
+                      </a:r>
+                      <a:r>
+                        <a:rPr sz="1100" b="1" i="0">
+                          <a:solidFill>
+                            <a:srgbClr val="2B2B2B"/>
+                          </a:solidFill>
+                          <a:latin typeface="Calibri"/>
+                        </a:rPr>
+                        <a:t>pregunta, objetivos y título</a:t>
+                      </a:r>
+                      <a:r>
+                        <a:rPr sz="1100" b="0" i="0">
+                          <a:solidFill>
+                            <a:srgbClr val="2B2B2B"/>
+                          </a:solidFill>
+                          <a:latin typeface="Calibri"/>
+                        </a:rPr>
+                        <a:t> provisional.</a:t>
+                      </a:r>
+                    </a:p>
+                  </a:txBody>
+                  <a:tcPr anchor="ctr" marL="109728" marR="91440" marT="36576" marB="36576">
+                    <a:solidFill>
+                      <a:srgbClr val="FFFFFF"/>
+                    </a:solidFill>
+                  </a:tcPr>
+                </a:tc>
+              </a:tr>
+              <a:tr h="477520">
+                <a:tc>
+                  <a:txBody>
+                    <a:bodyPr/>
+                    <a:lstStyle/>
+                    <a:p>
+                      <a:pPr algn="l"/>
+                      <a:r>
+                        <a:rPr sz="1100" b="1" i="0">
+                          <a:solidFill>
+                            <a:srgbClr val="2B2B2B"/>
+                          </a:solidFill>
+                          <a:latin typeface="Calibri"/>
+                        </a:rPr>
+                        <a:t>Sesión 05</a:t>
+                      </a:r>
+                      <a:r>
+                        <a:rPr sz="1100" b="0" i="0">
+                          <a:solidFill>
+                            <a:srgbClr val="2B2B2B"/>
+                          </a:solidFill>
+                          <a:latin typeface="Calibri"/>
+                        </a:rPr>
+                        <a:t> · ya cerró</a:t>
+                      </a:r>
+                    </a:p>
+                  </a:txBody>
+                  <a:tcPr anchor="ctr" marL="109728" marR="91440" marT="36576" marB="36576">
+                    <a:solidFill>
+                      <a:srgbClr val="F2F2F2"/>
+                    </a:solidFill>
+                  </a:tcPr>
+                </a:tc>
+                <a:tc>
+                  <a:txBody>
+                    <a:bodyPr/>
+                    <a:lstStyle/>
+                    <a:p>
+                      <a:pPr algn="l"/>
+                      <a:r>
+                        <a:rPr sz="1100" b="1" i="0">
+                          <a:solidFill>
+                            <a:srgbClr val="2B2B2B"/>
+                          </a:solidFill>
+                          <a:latin typeface="Calibri"/>
+                        </a:rPr>
+                        <a:t>Parcial 1</a:t>
+                      </a:r>
+                      <a:r>
+                        <a:rPr sz="1100" b="0" i="0">
+                          <a:solidFill>
+                            <a:srgbClr val="2B2B2B"/>
+                          </a:solidFill>
+                          <a:latin typeface="Calibri"/>
+                        </a:rPr>
+                        <a:t> · Cuestionario · 24%</a:t>
+                      </a:r>
+                    </a:p>
+                  </a:txBody>
+                  <a:tcPr anchor="ctr" marL="109728" marR="91440" marT="36576" marB="36576">
+                    <a:solidFill>
+                      <a:srgbClr val="F2F2F2"/>
+                    </a:solidFill>
+                  </a:tcPr>
+                </a:tc>
+                <a:tc>
+                  <a:txBody>
+                    <a:bodyPr/>
+                    <a:lstStyle/>
+                    <a:p>
+                      <a:pPr algn="l"/>
+                      <a:r>
+                        <a:rPr sz="1100" b="0" i="0">
+                          <a:solidFill>
+                            <a:srgbClr val="2B2B2B"/>
+                          </a:solidFill>
+                          <a:latin typeface="Calibri"/>
+                        </a:rPr>
+                        <a:t>Repasa </a:t>
+                      </a:r>
+                      <a:r>
+                        <a:rPr sz="1100" b="1" i="0">
+                          <a:solidFill>
+                            <a:srgbClr val="2B2B2B"/>
+                          </a:solidFill>
+                          <a:latin typeface="Calibri"/>
+                        </a:rPr>
+                        <a:t>estructura APA CUN</a:t>
+                      </a:r>
+                      <a:r>
+                        <a:rPr sz="1100" b="0" i="0">
+                          <a:solidFill>
+                            <a:srgbClr val="2B2B2B"/>
+                          </a:solidFill>
+                          <a:latin typeface="Calibri"/>
+                        </a:rPr>
+                        <a:t> y antecedentes Fase I, más pregunta, objetivos y título.</a:t>
+                      </a:r>
+                    </a:p>
+                  </a:txBody>
+                  <a:tcPr anchor="ctr" marL="109728" marR="91440" marT="36576" marB="36576">
+                    <a:solidFill>
+                      <a:srgbClr val="F2F2F2"/>
+                    </a:solidFill>
+                  </a:tcPr>
+                </a:tc>
+              </a:tr>
+              <a:tr h="477520">
+                <a:tc>
+                  <a:txBody>
+                    <a:bodyPr/>
+                    <a:lstStyle/>
+                    <a:p>
+                      <a:pPr algn="l"/>
+                      <a:r>
+                        <a:rPr sz="1100" b="1" i="0">
+                          <a:solidFill>
+                            <a:srgbClr val="2B2B2B"/>
+                          </a:solidFill>
+                          <a:latin typeface="Calibri"/>
+                        </a:rPr>
+                        <a:t>Sesión 07</a:t>
+                      </a:r>
+                      <a:r>
+                        <a:rPr sz="1100" b="0" i="0">
+                          <a:solidFill>
+                            <a:srgbClr val="2B2B2B"/>
+                          </a:solidFill>
+                          <a:latin typeface="Calibri"/>
+                        </a:rPr>
+                        <a:t> · ya cerró</a:t>
+                      </a:r>
+                    </a:p>
+                  </a:txBody>
+                  <a:tcPr anchor="ctr" marL="109728" marR="91440" marT="36576" marB="36576">
+                    <a:solidFill>
+                      <a:srgbClr val="FFFFFF"/>
+                    </a:solidFill>
+                  </a:tcPr>
+                </a:tc>
+                <a:tc>
+                  <a:txBody>
+                    <a:bodyPr/>
+                    <a:lstStyle/>
+                    <a:p>
+                      <a:pPr algn="l"/>
+                      <a:r>
+                        <a:rPr sz="1100" b="1" i="0">
+                          <a:solidFill>
+                            <a:srgbClr val="2B2B2B"/>
+                          </a:solidFill>
+                          <a:latin typeface="Calibri"/>
+                        </a:rPr>
+                        <a:t>Quiz 2</a:t>
+                      </a:r>
+                      <a:r>
+                        <a:rPr sz="1100" b="0" i="0">
+                          <a:solidFill>
+                            <a:srgbClr val="2B2B2B"/>
+                          </a:solidFill>
+                          <a:latin typeface="Calibri"/>
+                        </a:rPr>
+                        <a:t> · Cuestionario · 9%</a:t>
+                      </a:r>
+                    </a:p>
+                  </a:txBody>
+                  <a:tcPr anchor="ctr" marL="109728" marR="91440" marT="36576" marB="36576">
+                    <a:solidFill>
+                      <a:srgbClr val="FFFFFF"/>
+                    </a:solidFill>
+                  </a:tcPr>
+                </a:tc>
+                <a:tc>
+                  <a:txBody>
+                    <a:bodyPr/>
+                    <a:lstStyle/>
+                    <a:p>
+                      <a:pPr algn="l"/>
+                      <a:r>
+                        <a:rPr sz="1100" b="0" i="0">
+                          <a:solidFill>
+                            <a:srgbClr val="2B2B2B"/>
+                          </a:solidFill>
+                          <a:latin typeface="Calibri"/>
+                        </a:rPr>
+                        <a:t>Distingue </a:t>
+                      </a:r>
+                      <a:r>
+                        <a:rPr sz="1100" b="1" i="0">
+                          <a:solidFill>
+                            <a:srgbClr val="2B2B2B"/>
+                          </a:solidFill>
+                          <a:latin typeface="Calibri"/>
+                        </a:rPr>
+                        <a:t>marco teórico, conceptual y contextual</a:t>
+                      </a:r>
+                      <a:r>
+                        <a:rPr sz="1100" b="0" i="0">
+                          <a:solidFill>
+                            <a:srgbClr val="2B2B2B"/>
+                          </a:solidFill>
+                          <a:latin typeface="Calibri"/>
+                        </a:rPr>
+                        <a:t> y cómo se articulan con tu pregunta.</a:t>
+                      </a:r>
+                    </a:p>
+                  </a:txBody>
+                  <a:tcPr anchor="ctr" marL="109728" marR="91440" marT="36576" marB="36576">
+                    <a:solidFill>
+                      <a:srgbClr val="FFFFFF"/>
+                    </a:solidFill>
+                  </a:tcPr>
+                </a:tc>
+              </a:tr>
+              <a:tr h="477520">
+                <a:tc>
+                  <a:txBody>
+                    <a:bodyPr/>
+                    <a:lstStyle/>
+                    <a:p>
+                      <a:pPr algn="l"/>
+                      <a:r>
+                        <a:rPr sz="1100" b="1" i="0">
+                          <a:solidFill>
+                            <a:srgbClr val="2B2B2B"/>
+                          </a:solidFill>
+                          <a:latin typeface="Calibri"/>
+                        </a:rPr>
+                        <a:t>Sesión 08</a:t>
+                      </a:r>
+                      <a:r>
+                        <a:rPr sz="1100" b="0" i="0">
+                          <a:solidFill>
+                            <a:srgbClr val="2B2B2B"/>
+                          </a:solidFill>
+                          <a:latin typeface="Calibri"/>
+                        </a:rPr>
+                        <a:t> · ya cerró</a:t>
+                      </a:r>
+                    </a:p>
+                  </a:txBody>
+                  <a:tcPr anchor="ctr" marL="109728" marR="91440" marT="36576" marB="36576">
+                    <a:solidFill>
+                      <a:srgbClr val="F2F2F2"/>
+                    </a:solidFill>
+                  </a:tcPr>
+                </a:tc>
+                <a:tc>
+                  <a:txBody>
+                    <a:bodyPr/>
+                    <a:lstStyle/>
+                    <a:p>
+                      <a:pPr algn="l"/>
+                      <a:r>
+                        <a:rPr sz="1100" b="1" i="0">
+                          <a:solidFill>
+                            <a:srgbClr val="2B2B2B"/>
+                          </a:solidFill>
+                          <a:latin typeface="Calibri"/>
+                        </a:rPr>
+                        <a:t>Parcial 2</a:t>
+                      </a:r>
+                      <a:r>
+                        <a:rPr sz="1100" b="0" i="0">
+                          <a:solidFill>
+                            <a:srgbClr val="2B2B2B"/>
+                          </a:solidFill>
+                          <a:latin typeface="Calibri"/>
+                        </a:rPr>
+                        <a:t> · Cuestionario · 21%</a:t>
+                      </a:r>
+                    </a:p>
+                  </a:txBody>
+                  <a:tcPr anchor="ctr" marL="109728" marR="91440" marT="36576" marB="36576">
+                    <a:solidFill>
+                      <a:srgbClr val="F2F2F2"/>
+                    </a:solidFill>
+                  </a:tcPr>
+                </a:tc>
+                <a:tc>
+                  <a:txBody>
+                    <a:bodyPr/>
+                    <a:lstStyle/>
+                    <a:p>
+                      <a:pPr algn="l"/>
+                      <a:r>
+                        <a:rPr sz="1100" b="0" i="0">
+                          <a:solidFill>
+                            <a:srgbClr val="2B2B2B"/>
+                          </a:solidFill>
+                          <a:latin typeface="Calibri"/>
+                        </a:rPr>
+                        <a:t>Repasa los tres marcos y el </a:t>
+                      </a:r>
+                      <a:r>
+                        <a:rPr sz="1100" b="1" i="0">
+                          <a:solidFill>
+                            <a:srgbClr val="2B2B2B"/>
+                          </a:solidFill>
+                          <a:latin typeface="Calibri"/>
+                        </a:rPr>
+                        <a:t>diseño metodológico</a:t>
+                      </a:r>
+                      <a:r>
+                        <a:rPr sz="1100" b="0" i="0">
+                          <a:solidFill>
+                            <a:srgbClr val="2B2B2B"/>
+                          </a:solidFill>
+                          <a:latin typeface="Calibri"/>
+                        </a:rPr>
+                        <a:t>: enfoque, tipo, alcance y diseño.</a:t>
+                      </a:r>
+                    </a:p>
+                  </a:txBody>
+                  <a:tcPr anchor="ctr" marL="109728" marR="91440" marT="36576" marB="36576">
+                    <a:solidFill>
+                      <a:srgbClr val="F2F2F2"/>
+                    </a:solidFill>
+                  </a:tcPr>
+                </a:tc>
+              </a:tr>
+              <a:tr h="477520">
+                <a:tc>
+                  <a:txBody>
+                    <a:bodyPr/>
+                    <a:lstStyle/>
+                    <a:p>
+                      <a:pPr algn="l"/>
+                      <a:r>
+                        <a:rPr sz="1100" b="1" i="0">
+                          <a:solidFill>
+                            <a:srgbClr val="2B2B2B"/>
+                          </a:solidFill>
+                          <a:latin typeface="Calibri"/>
+                        </a:rPr>
+                        <a:t>Sesión 10</a:t>
+                      </a:r>
+                      <a:r>
+                        <a:rPr sz="1100" b="0" i="0">
+                          <a:solidFill>
+                            <a:srgbClr val="2B2B2B"/>
+                          </a:solidFill>
+                          <a:latin typeface="Calibri"/>
+                        </a:rPr>
+                        <a:t> · pendiente</a:t>
+                      </a:r>
+                    </a:p>
+                  </a:txBody>
+                  <a:tcPr anchor="ctr" marL="109728" marR="91440" marT="36576" marB="36576">
+                    <a:solidFill>
+                      <a:srgbClr val="FFFFFF"/>
+                    </a:solidFill>
+                  </a:tcPr>
+                </a:tc>
+                <a:tc>
+                  <a:txBody>
+                    <a:bodyPr/>
+                    <a:lstStyle/>
+                    <a:p>
+                      <a:pPr algn="l"/>
+                      <a:r>
+                        <a:rPr sz="1100" b="1" i="0">
+                          <a:solidFill>
+                            <a:srgbClr val="2B2B2B"/>
+                          </a:solidFill>
+                          <a:latin typeface="Calibri"/>
+                        </a:rPr>
+                        <a:t>Quiz 3</a:t>
+                      </a:r>
+                      <a:r>
+                        <a:rPr sz="1100" b="0" i="0">
+                          <a:solidFill>
+                            <a:srgbClr val="2B2B2B"/>
+                          </a:solidFill>
+                          <a:latin typeface="Calibri"/>
+                        </a:rPr>
+                        <a:t> · Cuestionario · 4%</a:t>
+                      </a:r>
+                    </a:p>
+                  </a:txBody>
+                  <a:tcPr anchor="ctr" marL="109728" marR="91440" marT="36576" marB="36576">
+                    <a:solidFill>
+                      <a:srgbClr val="FFFFFF"/>
+                    </a:solidFill>
+                  </a:tcPr>
+                </a:tc>
+                <a:tc>
+                  <a:txBody>
+                    <a:bodyPr/>
+                    <a:lstStyle/>
+                    <a:p>
+                      <a:pPr algn="l"/>
+                      <a:r>
+                        <a:rPr sz="1100" b="0" i="0">
+                          <a:solidFill>
+                            <a:srgbClr val="2B2B2B"/>
+                          </a:solidFill>
+                          <a:latin typeface="Calibri"/>
+                        </a:rPr>
+                        <a:t>Ten claros </a:t>
+                      </a:r>
+                      <a:r>
+                        <a:rPr sz="1100" b="1" i="0">
+                          <a:solidFill>
+                            <a:srgbClr val="2B2B2B"/>
+                          </a:solidFill>
+                          <a:latin typeface="Calibri"/>
+                        </a:rPr>
+                        <a:t>instrumentos y plan de análisis</a:t>
+                      </a:r>
+                      <a:r>
+                        <a:rPr sz="1100" b="0" i="0">
+                          <a:solidFill>
+                            <a:srgbClr val="2B2B2B"/>
+                          </a:solidFill>
+                          <a:latin typeface="Calibri"/>
+                        </a:rPr>
+                        <a:t> propuestos y la integración del avance.</a:t>
+                      </a:r>
+                    </a:p>
+                  </a:txBody>
+                  <a:tcPr anchor="ctr" marL="109728" marR="91440" marT="36576" marB="36576">
+                    <a:solidFill>
+                      <a:srgbClr val="FFFFFF"/>
+                    </a:solidFill>
+                  </a:tcPr>
+                </a:tc>
+              </a:tr>
+              <a:tr h="477520">
+                <a:tc>
+                  <a:txBody>
+                    <a:bodyPr/>
+                    <a:lstStyle/>
+                    <a:p>
+                      <a:pPr algn="l"/>
+                      <a:r>
+                        <a:rPr sz="1100" b="1" i="0">
+                          <a:solidFill>
+                            <a:srgbClr val="2B2B2B"/>
+                          </a:solidFill>
+                          <a:latin typeface="Calibri"/>
+                        </a:rPr>
+                        <a:t>Sesión 11</a:t>
+                      </a:r>
+                      <a:r>
+                        <a:rPr sz="1100" b="0" i="0">
+                          <a:solidFill>
+                            <a:srgbClr val="2B2B2B"/>
+                          </a:solidFill>
+                          <a:latin typeface="Calibri"/>
+                        </a:rPr>
+                        <a:t> · pendiente</a:t>
+                      </a:r>
+                    </a:p>
+                  </a:txBody>
+                  <a:tcPr anchor="ctr" marL="109728" marR="91440" marT="36576" marB="36576">
+                    <a:solidFill>
+                      <a:srgbClr val="F2F2F2"/>
+                    </a:solidFill>
+                  </a:tcPr>
+                </a:tc>
+                <a:tc>
+                  <a:txBody>
+                    <a:bodyPr/>
+                    <a:lstStyle/>
+                    <a:p>
+                      <a:pPr algn="l"/>
+                      <a:r>
+                        <a:rPr sz="1100" b="1" i="0">
+                          <a:solidFill>
+                            <a:srgbClr val="2B2B2B"/>
+                          </a:solidFill>
+                          <a:latin typeface="Calibri"/>
+                        </a:rPr>
+                        <a:t>ACA Final</a:t>
+                      </a:r>
+                      <a:r>
+                        <a:rPr sz="1100" b="0" i="0">
+                          <a:solidFill>
+                            <a:srgbClr val="2B2B2B"/>
+                          </a:solidFill>
+                          <a:latin typeface="Calibri"/>
+                        </a:rPr>
+                        <a:t> · Tarea · 32,8%</a:t>
+                      </a:r>
+                    </a:p>
+                  </a:txBody>
+                  <a:tcPr anchor="ctr" marL="109728" marR="91440" marT="36576" marB="36576">
+                    <a:solidFill>
+                      <a:srgbClr val="F2F2F2"/>
+                    </a:solidFill>
+                  </a:tcPr>
+                </a:tc>
+                <a:tc>
+                  <a:txBody>
+                    <a:bodyPr/>
+                    <a:lstStyle/>
+                    <a:p>
+                      <a:pPr algn="l"/>
+                      <a:r>
+                        <a:rPr sz="1100" b="0" i="0">
+                          <a:solidFill>
+                            <a:srgbClr val="2B2B2B"/>
+                          </a:solidFill>
+                          <a:latin typeface="Calibri"/>
+                        </a:rPr>
+                        <a:t>Sube el </a:t>
+                      </a:r>
+                      <a:r>
+                        <a:rPr sz="1100" b="1" i="0">
+                          <a:solidFill>
+                            <a:srgbClr val="2B2B2B"/>
+                          </a:solidFill>
+                          <a:latin typeface="Calibri"/>
+                        </a:rPr>
+                        <a:t>avance consolidado</a:t>
+                      </a:r>
+                      <a:r>
+                        <a:rPr sz="1100" b="0" i="0">
+                          <a:solidFill>
+                            <a:srgbClr val="2B2B2B"/>
+                          </a:solidFill>
+                          <a:latin typeface="Calibri"/>
+                        </a:rPr>
+                        <a:t> en plantilla APA CUN, integrado y listo para TG3.</a:t>
+                      </a:r>
+                    </a:p>
+                  </a:txBody>
+                  <a:tcPr anchor="ctr" marL="109728" marR="91440" marT="36576" marB="36576">
+                    <a:solidFill>
+                      <a:srgbClr val="F2F2F2"/>
+                    </a:solidFill>
+                  </a:tcPr>
+                </a:tc>
+              </a:tr>
+              <a:tr h="477520">
+                <a:tc>
+                  <a:txBody>
+                    <a:bodyPr/>
+                    <a:lstStyle/>
+                    <a:p>
+                      <a:pPr algn="l"/>
+                      <a:r>
+                        <a:rPr sz="1100" b="1" i="0">
+                          <a:solidFill>
+                            <a:srgbClr val="2B2B2B"/>
+                          </a:solidFill>
+                          <a:latin typeface="Calibri"/>
+                        </a:rPr>
+                        <a:t>Sesión 11</a:t>
+                      </a:r>
+                      <a:r>
+                        <a:rPr sz="1100" b="0" i="0">
+                          <a:solidFill>
+                            <a:srgbClr val="2B2B2B"/>
+                          </a:solidFill>
+                          <a:latin typeface="Calibri"/>
+                        </a:rPr>
+                        <a:t> · pendiente</a:t>
+                      </a:r>
+                    </a:p>
+                  </a:txBody>
+                  <a:tcPr anchor="ctr" marL="109728" marR="91440" marT="36576" marB="36576">
+                    <a:solidFill>
+                      <a:srgbClr val="FFFFFF"/>
+                    </a:solidFill>
+                  </a:tcPr>
+                </a:tc>
+                <a:tc>
+                  <a:txBody>
+                    <a:bodyPr/>
+                    <a:lstStyle/>
+                    <a:p>
+                      <a:pPr algn="l"/>
+                      <a:r>
+                        <a:rPr sz="1100" b="1" i="0">
+                          <a:solidFill>
+                            <a:srgbClr val="2B2B2B"/>
+                          </a:solidFill>
+                          <a:latin typeface="Calibri"/>
+                        </a:rPr>
+                        <a:t>Autoevaluación</a:t>
+                      </a:r>
+                      <a:r>
+                        <a:rPr sz="1100" b="0" i="0">
+                          <a:solidFill>
+                            <a:srgbClr val="2B2B2B"/>
+                          </a:solidFill>
+                          <a:latin typeface="Calibri"/>
+                        </a:rPr>
+                        <a:t> · Cuestionario · 1,6%</a:t>
+                      </a:r>
+                    </a:p>
+                  </a:txBody>
+                  <a:tcPr anchor="ctr" marL="109728" marR="91440" marT="36576" marB="36576">
+                    <a:solidFill>
+                      <a:srgbClr val="FFFFFF"/>
+                    </a:solidFill>
+                  </a:tcPr>
+                </a:tc>
+                <a:tc>
+                  <a:txBody>
+                    <a:bodyPr/>
+                    <a:lstStyle/>
+                    <a:p>
+                      <a:pPr algn="l"/>
+                      <a:r>
+                        <a:rPr sz="1100" b="0" i="0">
+                          <a:solidFill>
+                            <a:srgbClr val="2B2B2B"/>
+                          </a:solidFill>
+                          <a:latin typeface="Calibri"/>
+                        </a:rPr>
+                        <a:t>Diligénciala tú, de forma </a:t>
+                      </a:r>
+                      <a:r>
+                        <a:rPr sz="1100" b="1" i="0">
+                          <a:solidFill>
+                            <a:srgbClr val="2B2B2B"/>
+                          </a:solidFill>
+                          <a:latin typeface="Calibri"/>
+                        </a:rPr>
+                        <a:t>individual</a:t>
+                      </a:r>
+                      <a:r>
+                        <a:rPr sz="1100" b="0" i="0">
+                          <a:solidFill>
+                            <a:srgbClr val="2B2B2B"/>
+                          </a:solidFill>
+                          <a:latin typeface="Calibri"/>
+                        </a:rPr>
+                        <a:t>, valorando tu participación real.</a:t>
+                      </a:r>
+                    </a:p>
+                  </a:txBody>
+                  <a:tcPr anchor="ctr" marL="109728" marR="91440" marT="36576" marB="36576">
+                    <a:solidFill>
+                      <a:srgbClr val="FFFFFF"/>
+                    </a:solidFill>
+                  </a:tcPr>
+                </a:tc>
+              </a:tr>
+              <a:tr h="477520">
+                <a:tc>
+                  <a:txBody>
+                    <a:bodyPr/>
+                    <a:lstStyle/>
+                    <a:p>
+                      <a:pPr algn="l"/>
+                      <a:r>
+                        <a:rPr sz="1100" b="1" i="0">
+                          <a:solidFill>
+                            <a:srgbClr val="2B2B2B"/>
+                          </a:solidFill>
+                          <a:latin typeface="Calibri"/>
+                        </a:rPr>
+                        <a:t>Sesión 11</a:t>
+                      </a:r>
+                      <a:r>
+                        <a:rPr sz="1100" b="0" i="0">
+                          <a:solidFill>
+                            <a:srgbClr val="2B2B2B"/>
+                          </a:solidFill>
+                          <a:latin typeface="Calibri"/>
+                        </a:rPr>
+                        <a:t> · pendiente</a:t>
+                      </a:r>
+                    </a:p>
+                  </a:txBody>
+                  <a:tcPr anchor="ctr" marL="109728" marR="91440" marT="36576" marB="36576">
+                    <a:solidFill>
+                      <a:srgbClr val="F2F2F2"/>
+                    </a:solidFill>
+                  </a:tcPr>
+                </a:tc>
+                <a:tc>
+                  <a:txBody>
+                    <a:bodyPr/>
+                    <a:lstStyle/>
+                    <a:p>
+                      <a:pPr algn="l"/>
+                      <a:r>
+                        <a:rPr sz="1100" b="1" i="0">
+                          <a:solidFill>
+                            <a:srgbClr val="2B2B2B"/>
+                          </a:solidFill>
+                          <a:latin typeface="Calibri"/>
+                        </a:rPr>
+                        <a:t>Coevaluación</a:t>
+                      </a:r>
+                      <a:r>
+                        <a:rPr sz="1100" b="0" i="0">
+                          <a:solidFill>
+                            <a:srgbClr val="2B2B2B"/>
+                          </a:solidFill>
+                          <a:latin typeface="Calibri"/>
+                        </a:rPr>
+                        <a:t> · Foro · 1,6%</a:t>
+                      </a:r>
+                    </a:p>
+                  </a:txBody>
+                  <a:tcPr anchor="ctr" marL="109728" marR="91440" marT="36576" marB="36576">
+                    <a:solidFill>
+                      <a:srgbClr val="F2F2F2"/>
+                    </a:solidFill>
+                  </a:tcPr>
+                </a:tc>
+                <a:tc>
+                  <a:txBody>
+                    <a:bodyPr/>
+                    <a:lstStyle/>
+                    <a:p>
+                      <a:pPr algn="l"/>
+                      <a:r>
+                        <a:rPr sz="1100" b="1" i="0">
+                          <a:solidFill>
+                            <a:srgbClr val="2B2B2B"/>
+                          </a:solidFill>
+                          <a:latin typeface="Calibri"/>
+                        </a:rPr>
+                        <a:t>Publica</a:t>
+                      </a:r>
+                      <a:r>
+                        <a:rPr sz="1100" b="0" i="0">
+                          <a:solidFill>
+                            <a:srgbClr val="2B2B2B"/>
+                          </a:solidFill>
+                          <a:latin typeface="Calibri"/>
+                        </a:rPr>
+                        <a:t> tu aporte: valora hechos del trabajo del equipo, nunca a las personas.</a:t>
+                      </a:r>
+                    </a:p>
+                  </a:txBody>
+                  <a:tcPr anchor="ctr" marL="109728" marR="91440" marT="36576" marB="36576">
+                    <a:solidFill>
+                      <a:srgbClr val="F2F2F2"/>
+                    </a:solidFill>
+                  </a:tcPr>
+                </a:tc>
+              </a:tr>
+            </a:tbl>
+          </a:graphicData>
+        </a:graphic>
+      </p:graphicFrame>
+      <p:sp>
+        <p:nvSpPr>
+          <p:cNvPr id="6" name="TextBox 5"/>
+          <p:cNvSpPr txBox="1"/>
+          <p:nvPr/>
+        </p:nvSpPr>
+        <p:spPr>
+          <a:xfrm>
+            <a:off x="640080" y="6080760"/>
+            <a:ext cx="10911535" cy="548640"/>
+          </a:xfrm>
+          <a:prstGeom prst="rect">
+            <a:avLst/>
+          </a:prstGeom>
+          <a:noFill/>
+        </p:spPr>
+        <p:txBody>
+          <a:bodyPr wrap="square" anchor="t" lIns="0" rIns="0" tIns="0" bIns="0">
+            <a:spAutoFit/>
+          </a:bodyPr>
+          <a:lstStyle/>
+          <a:p>
+            <a:r>
+              <a:rPr sz="1200" b="0" i="1">
+                <a:solidFill>
+                  <a:srgbClr val="2B2B2B"/>
+                </a:solidFill>
+                <a:latin typeface="Calibri"/>
+              </a:rPr>
+              <a:t>Esta misma tabla va al final de todas las sesiones. La </a:t>
+            </a:r>
+            <a:r>
+              <a:rPr sz="1200" b="1" i="1">
+                <a:solidFill>
+                  <a:srgbClr val="2B2B2B"/>
+                </a:solidFill>
+                <a:latin typeface="Calibri"/>
+              </a:rPr>
+              <a:t>fecha</a:t>
+            </a:r>
+            <a:r>
+              <a:rPr sz="1200" b="0" i="1">
+                <a:solidFill>
+                  <a:srgbClr val="2B2B2B"/>
+                </a:solidFill>
+                <a:latin typeface="Calibri"/>
+              </a:rPr>
+              <a:t> de cada ventana está en el enunciado del ítem (`Clases/Recursos/ACAs/`) y en el aula: si el aula y cualquier otro material se contradicen, </a:t>
+            </a:r>
+            <a:r>
+              <a:rPr sz="1200" b="1" i="1">
+                <a:solidFill>
+                  <a:srgbClr val="2B2B2B"/>
+                </a:solidFill>
+                <a:latin typeface="Calibri"/>
+              </a:rPr>
+              <a:t>manda el aula</a:t>
+            </a:r>
+            <a:r>
+              <a:rPr sz="1200" b="0" i="1">
+                <a:solidFill>
+                  <a:srgbClr val="2B2B2B"/>
+                </a:solidFill>
+                <a:latin typeface="Calibri"/>
+              </a:rPr>
+              <a:t>.</a:t>
+            </a:r>
+          </a:p>
+        </p:txBody>
+      </p:sp>
+      <p:sp>
+        <p:nvSpPr>
+          <p:cNvPr id="7" name="TextBox 6"/>
+          <p:cNvSpPr txBox="1"/>
+          <p:nvPr/>
+        </p:nvSpPr>
+        <p:spPr>
+          <a:xfrm>
+            <a:off x="11094415" y="6446520"/>
+            <a:ext cx="548640" cy="274320"/>
+          </a:xfrm>
+          <a:prstGeom prst="rect">
+            <a:avLst/>
+          </a:prstGeom>
+          <a:noFill/>
+        </p:spPr>
+        <p:txBody>
+          <a:bodyPr wrap="square" anchor="t" lIns="0" rIns="0" tIns="0" bIns="0">
+            <a:spAutoFit/>
+          </a:bodyPr>
+          <a:lstStyle/>
+          <a:p>
+            <a:pPr algn="r"/>
+            <a:r>
+              <a:rPr sz="1000" b="1" i="0">
+                <a:solidFill>
+                  <a:srgbClr val="8F989D"/>
+                </a:solidFill>
+                <a:latin typeface="Calibri"/>
+              </a:rPr>
+              <a:t>19</a:t>
+            </a:r>
+          </a:p>
+        </p:txBody>
+      </p:sp>
+    </p:spTree>
+  </p:cSld>
+  <p:clrMapOvr>
+    <a:masterClrMapping/>
+  </p:clrMapOvr>
+</p:sld>
+</file>
+
+<file path=ppt/slides/slide2.xml><?xml version="1.0" encoding="utf-8"?>
+<p:sld xmlns:a="http://schemas.openxmlformats.org/drawingml/2006/main" xmlns:p="http://schemas.openxmlformats.org/presentationml/2006/main" xmlns:r="http://schemas.openxmlformats.org/officeDocument/2006/relationships">
+  <p:cSld>
+    <p:bg>
+      <p:bgPr>
+        <a:solidFill>
+          <a:srgbClr val="FFFFFF"/>
+        </a:solidFill>
+        <a:effectLst/>
+      </p:bgPr>
+    </p:bg>
+    <p:spTree>
+      <p:nvGrpSpPr>
+        <p:cNvPr id="1" name=""/>
+        <p:cNvGrpSpPr/>
+        <p:nvPr/>
+      </p:nvGrpSpPr>
+      <p:grpSpPr/>
+      <p:sp>
+        <p:nvSpPr>
+          <p:cNvPr id="2" name="Rectangle 1"/>
+          <p:cNvSpPr/>
+          <p:nvPr/>
+        </p:nvSpPr>
+        <p:spPr>
+          <a:xfrm>
+            <a:off x="0" y="0"/>
+            <a:ext cx="12191695" cy="1188720"/>
+          </a:xfrm>
+          <a:prstGeom prst="rect">
+            <a:avLst/>
+          </a:prstGeom>
+          <a:solidFill>
+            <a:srgbClr val="0C2340"/>
+          </a:solidFill>
+          <a:ln>
+            <a:noFill/>
+          </a:ln>
+          <a:effectLst/>
+        </p:spPr>
+        <p:style>
+          <a:lnRef idx="1">
+            <a:schemeClr val="accent1"/>
+          </a:lnRef>
+          <a:fillRef idx="3">
+            <a:schemeClr val="accent1"/>
+          </a:fillRef>
+          <a:effectRef idx="2">
+            <a:schemeClr val="accent1"/>
+          </a:effectRef>
+          <a:fontRef idx="minor">
+            <a:schemeClr val="lt1"/>
+          </a:fontRef>
+        </p:style>
+        <p:txBody>
+          <a:bodyPr rtlCol="0" anchor="ctr"/>
+          <a:lstStyle/>
+          <a:p>
+            <a:pPr algn="ctr"/>
+          </a:p>
+        </p:txBody>
+      </p:sp>
+      <p:sp>
+        <p:nvSpPr>
+          <p:cNvPr id="3" name="TextBox 2"/>
+          <p:cNvSpPr txBox="1"/>
+          <p:nvPr/>
+        </p:nvSpPr>
+        <p:spPr>
+          <a:xfrm>
+            <a:off x="640080" y="0"/>
+            <a:ext cx="9082735" cy="1188720"/>
+          </a:xfrm>
+          <a:prstGeom prst="rect">
+            <a:avLst/>
+          </a:prstGeom>
+          <a:noFill/>
+        </p:spPr>
+        <p:txBody>
+          <a:bodyPr wrap="square" anchor="ctr" lIns="0" rIns="0" tIns="0" bIns="0">
+            <a:spAutoFit/>
+          </a:bodyPr>
+          <a:lstStyle/>
+          <a:p>
+            <a:pPr algn="ctr"/>
+            <a:r>
+              <a:rPr sz="2600" b="1" i="0">
+                <a:solidFill>
+                  <a:srgbClr val="FFFFFF"/>
+                </a:solidFill>
+                <a:latin typeface="Calibri"/>
+              </a:rPr>
+              <a:t>Buenas secciones no hacen un buen documento</a:t>
+            </a:r>
+          </a:p>
+        </p:txBody>
+      </p:sp>
+      <p:sp>
+        <p:nvSpPr>
+          <p:cNvPr id="4" name="TextBox 3"/>
+          <p:cNvSpPr txBox="1"/>
+          <p:nvPr/>
+        </p:nvSpPr>
+        <p:spPr>
+          <a:xfrm>
+            <a:off x="640080" y="1691639"/>
+            <a:ext cx="10911535" cy="4617720"/>
+          </a:xfrm>
+          <a:prstGeom prst="rect">
+            <a:avLst/>
+          </a:prstGeom>
+          <a:noFill/>
+        </p:spPr>
+        <p:txBody>
+          <a:bodyPr wrap="square" anchor="t" lIns="0" rIns="0" tIns="0" bIns="0">
+            <a:spAutoFit/>
+          </a:bodyPr>
+          <a:lstStyle/>
+          <a:p>
+            <a:pPr>
+              <a:spcAft>
+                <a:spcPts val="1000"/>
+              </a:spcAft>
+            </a:pPr>
+            <a:r>
+              <a:rPr sz="1600" b="0" i="0">
+                <a:solidFill>
+                  <a:srgbClr val="2B2B2B"/>
+                </a:solidFill>
+                <a:latin typeface="Calibri"/>
+              </a:rPr>
+              <a:t>–   Hasta hoy escribimos por partes: una semana el problema, otra el marco, otra la metodología.</a:t>
+            </a:r>
+          </a:p>
+          <a:p>
+            <a:pPr lvl="1">
+              <a:spcAft>
+                <a:spcPts val="600"/>
+              </a:spcAft>
+            </a:pPr>
+            <a:r>
+              <a:rPr sz="1500" b="0" i="0">
+                <a:solidFill>
+                  <a:srgbClr val="2B2B2B"/>
+                </a:solidFill>
+                <a:latin typeface="Calibri"/>
+              </a:rPr>
+              <a:t>●   El riesgo es conocido: cada sección se ve decente y el documento completo </a:t>
+            </a:r>
+            <a:r>
+              <a:rPr sz="1500" b="1" i="0">
+                <a:solidFill>
+                  <a:srgbClr val="2B2B2B"/>
+                </a:solidFill>
+                <a:latin typeface="Calibri"/>
+              </a:rPr>
+              <a:t>no cuenta una sola historia</a:t>
+            </a:r>
+            <a:r>
+              <a:rPr sz="1500" b="0" i="0">
+                <a:solidFill>
+                  <a:srgbClr val="2B2B2B"/>
+                </a:solidFill>
+                <a:latin typeface="Calibri"/>
+              </a:rPr>
+              <a:t>.</a:t>
+            </a:r>
+          </a:p>
+          <a:p>
+            <a:pPr>
+              <a:spcAft>
+                <a:spcPts val="1000"/>
+              </a:spcAft>
+            </a:pPr>
+            <a:r>
+              <a:rPr sz="1600" b="0" i="0">
+                <a:solidFill>
+                  <a:srgbClr val="2B2B2B"/>
+                </a:solidFill>
+                <a:latin typeface="Calibri"/>
+              </a:rPr>
+              <a:t>–   Caso real y frecuente: el problema habla de tiempos de atención, el marco desarrolla teoría de gestión del cambio y la metodología mide exactitud de un modelo.</a:t>
+            </a:r>
+          </a:p>
+          <a:p>
+            <a:pPr lvl="1">
+              <a:spcAft>
+                <a:spcPts val="600"/>
+              </a:spcAft>
+            </a:pPr>
+            <a:r>
+              <a:rPr sz="1500" b="0" i="0">
+                <a:solidFill>
+                  <a:srgbClr val="2B2B2B"/>
+                </a:solidFill>
+                <a:latin typeface="Calibri"/>
+              </a:rPr>
+              <a:t>●   Tres secciones bien escritas, tres proyectos distintos en el mismo archivo.</a:t>
+            </a:r>
+          </a:p>
+          <a:p>
+            <a:pPr>
+              <a:spcAft>
+                <a:spcPts val="1000"/>
+              </a:spcAft>
+            </a:pPr>
+            <a:r>
+              <a:rPr sz="1600" b="0" i="0">
+                <a:solidFill>
+                  <a:srgbClr val="2B2B2B"/>
+                </a:solidFill>
+                <a:latin typeface="Calibri"/>
+              </a:rPr>
+              <a:t>–   Hoy no hay tema nuevo: hoy es sesión de </a:t>
+            </a:r>
+            <a:r>
+              <a:rPr sz="1600" b="1" i="0">
+                <a:solidFill>
+                  <a:srgbClr val="2B2B2B"/>
+                </a:solidFill>
+                <a:latin typeface="Calibri"/>
+              </a:rPr>
+              <a:t>costura</a:t>
+            </a:r>
+            <a:r>
+              <a:rPr sz="1600" b="0" i="0">
+                <a:solidFill>
+                  <a:srgbClr val="2B2B2B"/>
+                </a:solidFill>
+                <a:latin typeface="Calibri"/>
+              </a:rPr>
+              <a:t>. Se lee todo de corrido y se cose lo que no encaja.</a:t>
+            </a:r>
+          </a:p>
+          <a:p>
+            <a:pPr>
+              <a:spcAft>
+                <a:spcPts val="1000"/>
+              </a:spcAft>
+            </a:pPr>
+            <a:r>
+              <a:rPr sz="1600" b="0" i="0">
+                <a:solidFill>
+                  <a:srgbClr val="2B2B2B"/>
+                </a:solidFill>
+                <a:latin typeface="Calibri"/>
+              </a:rPr>
+              <a:t>–   Dos herramientas: el </a:t>
+            </a:r>
+            <a:r>
+              <a:rPr sz="1600" b="1" i="0">
+                <a:solidFill>
+                  <a:srgbClr val="2B2B2B"/>
+                </a:solidFill>
+                <a:latin typeface="Calibri"/>
+              </a:rPr>
+              <a:t>semáforo por sección</a:t>
+            </a:r>
+            <a:r>
+              <a:rPr sz="1600" b="0" i="0">
+                <a:solidFill>
+                  <a:srgbClr val="2B2B2B"/>
+                </a:solidFill>
+                <a:latin typeface="Calibri"/>
+              </a:rPr>
+              <a:t> para ver el estado real y la </a:t>
+            </a:r>
+            <a:r>
+              <a:rPr sz="1600" b="1" i="0">
+                <a:solidFill>
+                  <a:srgbClr val="2B2B2B"/>
+                </a:solidFill>
+                <a:latin typeface="Calibri"/>
+              </a:rPr>
+              <a:t>matriz de gaps</a:t>
+            </a:r>
+            <a:r>
+              <a:rPr sz="1600" b="0" i="0">
+                <a:solidFill>
+                  <a:srgbClr val="2B2B2B"/>
+                </a:solidFill>
+                <a:latin typeface="Calibri"/>
+              </a:rPr>
+              <a:t> para convertirlo en acciones.</a:t>
+            </a:r>
+          </a:p>
+          <a:p>
+            <a:pPr lvl="1">
+              <a:spcAft>
+                <a:spcPts val="600"/>
+              </a:spcAft>
+            </a:pPr>
+            <a:r>
+              <a:rPr sz="1500" b="0" i="0">
+                <a:solidFill>
+                  <a:srgbClr val="2B2B2B"/>
+                </a:solidFill>
+                <a:latin typeface="Calibri"/>
+              </a:rPr>
+              <a:t>●   Y un criterio duro que va a guiar toda la sesión: </a:t>
+            </a:r>
+            <a:r>
+              <a:rPr sz="1500" b="1" i="0">
+                <a:solidFill>
+                  <a:srgbClr val="2B2B2B"/>
+                </a:solidFill>
+                <a:latin typeface="Calibri"/>
+              </a:rPr>
+              <a:t>coherencia antes que pulido</a:t>
+            </a:r>
+            <a:r>
+              <a:rPr sz="1500" b="0" i="0">
+                <a:solidFill>
+                  <a:srgbClr val="2B2B2B"/>
+                </a:solidFill>
+                <a:latin typeface="Calibri"/>
+              </a:rPr>
+              <a:t>.</a:t>
+            </a:r>
+          </a:p>
+        </p:txBody>
+      </p:sp>
+      <p:sp>
+        <p:nvSpPr>
+          <p:cNvPr id="5" name="TextBox 4"/>
+          <p:cNvSpPr txBox="1"/>
+          <p:nvPr/>
+        </p:nvSpPr>
+        <p:spPr>
+          <a:xfrm>
+            <a:off x="11094415" y="6446520"/>
+            <a:ext cx="548640" cy="274320"/>
+          </a:xfrm>
+          <a:prstGeom prst="rect">
+            <a:avLst/>
+          </a:prstGeom>
+          <a:noFill/>
+        </p:spPr>
+        <p:txBody>
+          <a:bodyPr wrap="square" anchor="t" lIns="0" rIns="0" tIns="0" bIns="0">
+            <a:spAutoFit/>
+          </a:bodyPr>
+          <a:lstStyle/>
+          <a:p>
+            <a:pPr algn="r"/>
+            <a:r>
+              <a:rPr sz="1000" b="1" i="0">
+                <a:solidFill>
+                  <a:srgbClr val="8F989D"/>
+                </a:solidFill>
+                <a:latin typeface="Calibri"/>
+              </a:rPr>
+              <a:t>2</a:t>
+            </a:r>
+          </a:p>
+        </p:txBody>
+      </p:sp>
+      <p:sp>
+        <p:nvSpPr>
+          <p:cNvPr id="6" name="TextBox 5"/>
+          <p:cNvSpPr txBox="1"/>
+          <p:nvPr/>
+        </p:nvSpPr>
+        <p:spPr>
+          <a:xfrm>
+            <a:off x="640080" y="5943600"/>
+            <a:ext cx="9997135" cy="457200"/>
+          </a:xfrm>
+          <a:prstGeom prst="rect">
+            <a:avLst/>
+          </a:prstGeom>
+          <a:noFill/>
+        </p:spPr>
+        <p:txBody>
+          <a:bodyPr wrap="square" anchor="t" lIns="0" rIns="0" tIns="0" bIns="0">
+            <a:spAutoFit/>
+          </a:bodyPr>
+          <a:lstStyle/>
+          <a:p>
+            <a:r>
+              <a:rPr sz="1200" b="0" i="1">
+                <a:solidFill>
+                  <a:srgbClr val="2B2B2B"/>
+                </a:solidFill>
+                <a:latin typeface="Calibri"/>
+              </a:rPr>
+              <a:t>Salida esperada: semáforo diligenciado, matriz de gaps priorizada y el gap más grave ya empezado.</a:t>
+            </a:r>
+          </a:p>
+        </p:txBody>
+      </p:sp>
+    </p:spTree>
+  </p:cSld>
+  <p:clrMapOvr>
+    <a:masterClrMapping/>
+  </p:clrMapOvr>
+</p:sld>
+</file>
+
+<file path=ppt/slides/slide20.xml><?xml version="1.0" encoding="utf-8"?>
 <p:sld xmlns:a="http://schemas.openxmlformats.org/drawingml/2006/main" xmlns:p="http://schemas.openxmlformats.org/presentationml/2006/main" xmlns:r="http://schemas.openxmlformats.org/officeDocument/2006/relationships">
   <p:cSld>
     <p:bg>
@@ -6757,405 +8913,6 @@
                 <a:latin typeface="Calibri"/>
               </a:rPr>
               <a:t>TRABAJO DE GRADO 2</a:t>
-            </a:r>
-          </a:p>
-        </p:txBody>
-      </p:sp>
-    </p:spTree>
-  </p:cSld>
-  <p:clrMapOvr>
-    <a:masterClrMapping/>
-  </p:clrMapOvr>
-</p:sld>
-</file>
-
-<file path=ppt/slides/slide2.xml><?xml version="1.0" encoding="utf-8"?>
-<p:sld xmlns:a="http://schemas.openxmlformats.org/drawingml/2006/main" xmlns:p="http://schemas.openxmlformats.org/presentationml/2006/main" xmlns:r="http://schemas.openxmlformats.org/officeDocument/2006/relationships">
-  <p:cSld>
-    <p:bg>
-      <p:bgPr>
-        <a:solidFill>
-          <a:srgbClr val="FFFFFF"/>
-        </a:solidFill>
-        <a:effectLst/>
-      </p:bgPr>
-    </p:bg>
-    <p:spTree>
-      <p:nvGrpSpPr>
-        <p:cNvPr id="1" name=""/>
-        <p:cNvGrpSpPr/>
-        <p:nvPr/>
-      </p:nvGrpSpPr>
-      <p:grpSpPr/>
-      <p:sp>
-        <p:nvSpPr>
-          <p:cNvPr id="2" name="Rectangle 1"/>
-          <p:cNvSpPr/>
-          <p:nvPr/>
-        </p:nvSpPr>
-        <p:spPr>
-          <a:xfrm>
-            <a:off x="0" y="0"/>
-            <a:ext cx="12191695" cy="1188720"/>
-          </a:xfrm>
-          <a:prstGeom prst="rect">
-            <a:avLst/>
-          </a:prstGeom>
-          <a:solidFill>
-            <a:srgbClr val="0C2340"/>
-          </a:solidFill>
-          <a:ln>
-            <a:noFill/>
-          </a:ln>
-          <a:effectLst/>
-        </p:spPr>
-        <p:style>
-          <a:lnRef idx="1">
-            <a:schemeClr val="accent1"/>
-          </a:lnRef>
-          <a:fillRef idx="3">
-            <a:schemeClr val="accent1"/>
-          </a:fillRef>
-          <a:effectRef idx="2">
-            <a:schemeClr val="accent1"/>
-          </a:effectRef>
-          <a:fontRef idx="minor">
-            <a:schemeClr val="lt1"/>
-          </a:fontRef>
-        </p:style>
-        <p:txBody>
-          <a:bodyPr rtlCol="0" anchor="ctr"/>
-          <a:lstStyle/>
-          <a:p>
-            <a:pPr algn="ctr"/>
-          </a:p>
-        </p:txBody>
-      </p:sp>
-      <p:sp>
-        <p:nvSpPr>
-          <p:cNvPr id="3" name="TextBox 2"/>
-          <p:cNvSpPr txBox="1"/>
-          <p:nvPr/>
-        </p:nvSpPr>
-        <p:spPr>
-          <a:xfrm>
-            <a:off x="640080" y="0"/>
-            <a:ext cx="9082735" cy="1188720"/>
-          </a:xfrm>
-          <a:prstGeom prst="rect">
-            <a:avLst/>
-          </a:prstGeom>
-          <a:noFill/>
-        </p:spPr>
-        <p:txBody>
-          <a:bodyPr wrap="square" anchor="ctr" lIns="0" rIns="0" tIns="0" bIns="0">
-            <a:spAutoFit/>
-          </a:bodyPr>
-          <a:lstStyle/>
-          <a:p>
-            <a:pPr algn="ctr"/>
-            <a:r>
-              <a:rPr sz="2600" b="1" i="0">
-                <a:solidFill>
-                  <a:srgbClr val="FFFFFF"/>
-                </a:solidFill>
-                <a:latin typeface="Calibri"/>
-              </a:rPr>
-              <a:t>Buenas secciones no hacen un buen documento</a:t>
-            </a:r>
-          </a:p>
-        </p:txBody>
-      </p:sp>
-      <p:sp>
-        <p:nvSpPr>
-          <p:cNvPr id="4" name="TextBox 3"/>
-          <p:cNvSpPr txBox="1"/>
-          <p:nvPr/>
-        </p:nvSpPr>
-        <p:spPr>
-          <a:xfrm>
-            <a:off x="640080" y="1691639"/>
-            <a:ext cx="10911535" cy="4617720"/>
-          </a:xfrm>
-          <a:prstGeom prst="rect">
-            <a:avLst/>
-          </a:prstGeom>
-          <a:noFill/>
-        </p:spPr>
-        <p:txBody>
-          <a:bodyPr wrap="square" anchor="t" lIns="0" rIns="0" tIns="0" bIns="0">
-            <a:spAutoFit/>
-          </a:bodyPr>
-          <a:lstStyle/>
-          <a:p>
-            <a:pPr>
-              <a:spcAft>
-                <a:spcPts val="1000"/>
-              </a:spcAft>
-            </a:pPr>
-            <a:r>
-              <a:rPr sz="1600" b="0" i="0">
-                <a:solidFill>
-                  <a:srgbClr val="2B2B2B"/>
-                </a:solidFill>
-                <a:latin typeface="Calibri"/>
-              </a:rPr>
-              <a:t>–   Hasta hoy escribimos por partes: una semana el problema, otra el marco, otra la metodología.</a:t>
-            </a:r>
-          </a:p>
-          <a:p>
-            <a:pPr lvl="1">
-              <a:spcAft>
-                <a:spcPts val="600"/>
-              </a:spcAft>
-            </a:pPr>
-            <a:r>
-              <a:rPr sz="1500" b="0" i="0">
-                <a:solidFill>
-                  <a:srgbClr val="2B2B2B"/>
-                </a:solidFill>
-                <a:latin typeface="Calibri"/>
-              </a:rPr>
-              <a:t>●   El riesgo es conocido: cada sección se ve decente y el documento completo </a:t>
-            </a:r>
-            <a:r>
-              <a:rPr sz="1500" b="1" i="0">
-                <a:solidFill>
-                  <a:srgbClr val="2B2B2B"/>
-                </a:solidFill>
-                <a:latin typeface="Calibri"/>
-              </a:rPr>
-              <a:t>no cuenta una sola historia</a:t>
-            </a:r>
-            <a:r>
-              <a:rPr sz="1500" b="0" i="0">
-                <a:solidFill>
-                  <a:srgbClr val="2B2B2B"/>
-                </a:solidFill>
-                <a:latin typeface="Calibri"/>
-              </a:rPr>
-              <a:t>.</a:t>
-            </a:r>
-          </a:p>
-          <a:p>
-            <a:pPr>
-              <a:spcAft>
-                <a:spcPts val="1000"/>
-              </a:spcAft>
-            </a:pPr>
-            <a:r>
-              <a:rPr sz="1600" b="0" i="0">
-                <a:solidFill>
-                  <a:srgbClr val="2B2B2B"/>
-                </a:solidFill>
-                <a:latin typeface="Calibri"/>
-              </a:rPr>
-              <a:t>–   Caso real y frecuente: el problema habla de tiempos de atención, el marco desarrolla teoría de gestión del cambio y la metodología mide exactitud de un modelo.</a:t>
-            </a:r>
-          </a:p>
-          <a:p>
-            <a:pPr lvl="1">
-              <a:spcAft>
-                <a:spcPts val="600"/>
-              </a:spcAft>
-            </a:pPr>
-            <a:r>
-              <a:rPr sz="1500" b="0" i="0">
-                <a:solidFill>
-                  <a:srgbClr val="2B2B2B"/>
-                </a:solidFill>
-                <a:latin typeface="Calibri"/>
-              </a:rPr>
-              <a:t>●   Tres secciones bien escritas, tres proyectos distintos en el mismo archivo.</a:t>
-            </a:r>
-          </a:p>
-          <a:p>
-            <a:pPr>
-              <a:spcAft>
-                <a:spcPts val="1000"/>
-              </a:spcAft>
-            </a:pPr>
-            <a:r>
-              <a:rPr sz="1600" b="0" i="0">
-                <a:solidFill>
-                  <a:srgbClr val="2B2B2B"/>
-                </a:solidFill>
-                <a:latin typeface="Calibri"/>
-              </a:rPr>
-              <a:t>–   Hoy no hay tema nuevo: hoy es sesión de </a:t>
-            </a:r>
-            <a:r>
-              <a:rPr sz="1600" b="1" i="0">
-                <a:solidFill>
-                  <a:srgbClr val="2B2B2B"/>
-                </a:solidFill>
-                <a:latin typeface="Calibri"/>
-              </a:rPr>
-              <a:t>costura</a:t>
-            </a:r>
-            <a:r>
-              <a:rPr sz="1600" b="0" i="0">
-                <a:solidFill>
-                  <a:srgbClr val="2B2B2B"/>
-                </a:solidFill>
-                <a:latin typeface="Calibri"/>
-              </a:rPr>
-              <a:t>. Se lee todo de corrido y se cose lo que no encaja.</a:t>
-            </a:r>
-          </a:p>
-          <a:p>
-            <a:pPr>
-              <a:spcAft>
-                <a:spcPts val="1000"/>
-              </a:spcAft>
-            </a:pPr>
-            <a:r>
-              <a:rPr sz="1600" b="0" i="0">
-                <a:solidFill>
-                  <a:srgbClr val="2B2B2B"/>
-                </a:solidFill>
-                <a:latin typeface="Calibri"/>
-              </a:rPr>
-              <a:t>–   Dos herramientas: el </a:t>
-            </a:r>
-            <a:r>
-              <a:rPr sz="1600" b="1" i="0">
-                <a:solidFill>
-                  <a:srgbClr val="2B2B2B"/>
-                </a:solidFill>
-                <a:latin typeface="Calibri"/>
-              </a:rPr>
-              <a:t>semáforo por sección</a:t>
-            </a:r>
-            <a:r>
-              <a:rPr sz="1600" b="0" i="0">
-                <a:solidFill>
-                  <a:srgbClr val="2B2B2B"/>
-                </a:solidFill>
-                <a:latin typeface="Calibri"/>
-              </a:rPr>
-              <a:t> para ver el estado real y la </a:t>
-            </a:r>
-            <a:r>
-              <a:rPr sz="1600" b="1" i="0">
-                <a:solidFill>
-                  <a:srgbClr val="2B2B2B"/>
-                </a:solidFill>
-                <a:latin typeface="Calibri"/>
-              </a:rPr>
-              <a:t>matriz de gaps</a:t>
-            </a:r>
-            <a:r>
-              <a:rPr sz="1600" b="0" i="0">
-                <a:solidFill>
-                  <a:srgbClr val="2B2B2B"/>
-                </a:solidFill>
-                <a:latin typeface="Calibri"/>
-              </a:rPr>
-              <a:t> para convertirlo en acciones.</a:t>
-            </a:r>
-          </a:p>
-          <a:p>
-            <a:pPr lvl="1">
-              <a:spcAft>
-                <a:spcPts val="600"/>
-              </a:spcAft>
-            </a:pPr>
-            <a:r>
-              <a:rPr sz="1500" b="0" i="0">
-                <a:solidFill>
-                  <a:srgbClr val="2B2B2B"/>
-                </a:solidFill>
-                <a:latin typeface="Calibri"/>
-              </a:rPr>
-              <a:t>●   Y un criterio duro que va a guiar toda la sesión: </a:t>
-            </a:r>
-            <a:r>
-              <a:rPr sz="1500" b="1" i="0">
-                <a:solidFill>
-                  <a:srgbClr val="2B2B2B"/>
-                </a:solidFill>
-                <a:latin typeface="Calibri"/>
-              </a:rPr>
-              <a:t>coherencia antes que pulido</a:t>
-            </a:r>
-            <a:r>
-              <a:rPr sz="1500" b="0" i="0">
-                <a:solidFill>
-                  <a:srgbClr val="2B2B2B"/>
-                </a:solidFill>
-                <a:latin typeface="Calibri"/>
-              </a:rPr>
-              <a:t>.</a:t>
-            </a:r>
-          </a:p>
-        </p:txBody>
-      </p:sp>
-      <p:sp>
-        <p:nvSpPr>
-          <p:cNvPr id="5" name="TextBox 4"/>
-          <p:cNvSpPr txBox="1"/>
-          <p:nvPr/>
-        </p:nvSpPr>
-        <p:spPr>
-          <a:xfrm>
-            <a:off x="11094415" y="6446520"/>
-            <a:ext cx="548640" cy="274320"/>
-          </a:xfrm>
-          <a:prstGeom prst="rect">
-            <a:avLst/>
-          </a:prstGeom>
-          <a:noFill/>
-        </p:spPr>
-        <p:txBody>
-          <a:bodyPr wrap="square" anchor="t" lIns="0" rIns="0" tIns="0" bIns="0">
-            <a:spAutoFit/>
-          </a:bodyPr>
-          <a:lstStyle/>
-          <a:p>
-            <a:pPr algn="r"/>
-            <a:r>
-              <a:rPr sz="1000" b="1" i="0">
-                <a:solidFill>
-                  <a:srgbClr val="8F989D"/>
-                </a:solidFill>
-                <a:latin typeface="Calibri"/>
-              </a:rPr>
-              <a:t>2</a:t>
-            </a:r>
-          </a:p>
-        </p:txBody>
-      </p:sp>
-      <p:sp>
-        <p:nvSpPr>
-          <p:cNvPr id="6" name="TextBox 5"/>
-          <p:cNvSpPr txBox="1"/>
-          <p:nvPr/>
-        </p:nvSpPr>
-        <p:spPr>
-          <a:xfrm>
-            <a:off x="640080" y="5943600"/>
-            <a:ext cx="9997135" cy="457200"/>
-          </a:xfrm>
-          <a:prstGeom prst="rect">
-            <a:avLst/>
-          </a:prstGeom>
-          <a:noFill/>
-        </p:spPr>
-        <p:txBody>
-          <a:bodyPr wrap="square" anchor="t" lIns="0" rIns="0" tIns="0" bIns="0">
-            <a:spAutoFit/>
-          </a:bodyPr>
-          <a:lstStyle/>
-          <a:p>
-            <a:r>
-              <a:rPr sz="1200" b="0" i="1">
-                <a:solidFill>
-                  <a:srgbClr val="2B2B2B"/>
-                </a:solidFill>
-                <a:latin typeface="Calibri"/>
-              </a:rPr>
-              <a:t>Salida esperada: semáforo diligenciado, matriz de gaps priorizada y el gap más grave ya empezado.</a:t>
             </a:r>
           </a:p>
         </p:txBody>
